--- a/Lecture Slides/22 - Networking - Socket Programming.pptx
+++ b/Lecture Slides/22 - Networking - Socket Programming.pptx
@@ -771,7 +771,64 @@
               </a:spcAft>
               <a:buNone/>
             </a:pPr>
-            <a:endParaRPr/>
+            <a:r>
+              <a:rPr lang="en-US" dirty="0"/>
+              <a:t>Mnemonics for OSI Model:</a:t>
+            </a:r>
+          </a:p>
+          <a:p>
+            <a:pPr marL="171450" lvl="0" indent="-171450" algn="l" rtl="0">
+              <a:spcBef>
+                <a:spcPts val="0"/>
+              </a:spcBef>
+              <a:spcAft>
+                <a:spcPts val="0"/>
+              </a:spcAft>
+            </a:pPr>
+            <a:r>
+              <a:rPr lang="en-US" dirty="0"/>
+              <a:t>"All People Seem To Need Data Processing"</a:t>
+            </a:r>
+          </a:p>
+          <a:p>
+            <a:pPr marL="171450" lvl="0" indent="-171450" algn="l" rtl="0">
+              <a:spcBef>
+                <a:spcPts val="0"/>
+              </a:spcBef>
+              <a:spcAft>
+                <a:spcPts val="0"/>
+              </a:spcAft>
+            </a:pPr>
+            <a:r>
+              <a:rPr lang="en-US" dirty="0"/>
+              <a:t>"Please Do Not Throw Sausage Pizza Away"</a:t>
+            </a:r>
+          </a:p>
+          <a:p>
+            <a:pPr marL="171450" lvl="0" indent="-171450" algn="l" rtl="0">
+              <a:spcBef>
+                <a:spcPts val="0"/>
+              </a:spcBef>
+              <a:spcAft>
+                <a:spcPts val="0"/>
+              </a:spcAft>
+            </a:pPr>
+            <a:r>
+              <a:rPr lang="en-US" dirty="0"/>
+              <a:t>"Please Do Not Teach Sales People Anything"</a:t>
+            </a:r>
+          </a:p>
+          <a:p>
+            <a:pPr marL="0" lvl="0" indent="0" algn="l" rtl="0">
+              <a:spcBef>
+                <a:spcPts val="0"/>
+              </a:spcBef>
+              <a:spcAft>
+                <a:spcPts val="0"/>
+              </a:spcAft>
+              <a:buNone/>
+            </a:pPr>
+            <a:endParaRPr lang="en-US" dirty="0"/>
           </a:p>
         </p:txBody>
       </p:sp>
@@ -876,8 +933,12 @@
               <a:buNone/>
             </a:pPr>
             <a:r>
+              <a:rPr lang="en-US" b="1" u="sng" dirty="0"/>
+              <a:t>Two Transport Protocols:</a:t>
+            </a:r>
+            <a:r>
               <a:rPr lang="en-US" b="1" dirty="0"/>
-              <a:t>Transport Protocols: UDP vs. TCP</a:t>
+              <a:t> UDP vs. TCP</a:t>
             </a:r>
           </a:p>
           <a:p>
@@ -1010,7 +1071,417 @@
               </a:rPr>
               <a:t>Reliable, connection-oriented "byte-stream" transfer (like a pipe).</a:t>
             </a:r>
+          </a:p>
+          <a:p>
+            <a:pPr marL="0" lvl="0" indent="0" algn="l" rtl="0">
+              <a:spcBef>
+                <a:spcPts val="0"/>
+              </a:spcBef>
+              <a:spcAft>
+                <a:spcPts val="0"/>
+              </a:spcAft>
+              <a:buNone/>
+            </a:pPr>
+            <a:endParaRPr lang="en-US" sz="1100" b="0" i="0" u="none" strike="noStrike" cap="none" dirty="0">
+              <a:solidFill>
+                <a:srgbClr val="000000"/>
+              </a:solidFill>
+              <a:effectLst/>
+              <a:latin typeface="Arial"/>
+              <a:ea typeface="Arial"/>
+              <a:cs typeface="Arial"/>
+              <a:sym typeface="Arial"/>
+            </a:endParaRPr>
+          </a:p>
+          <a:p>
+            <a:pPr marL="0" lvl="0" indent="0" algn="l" rtl="0">
+              <a:spcBef>
+                <a:spcPts val="0"/>
+              </a:spcBef>
+              <a:spcAft>
+                <a:spcPts val="0"/>
+              </a:spcAft>
+              <a:buNone/>
+            </a:pPr>
+            <a:r>
+              <a:rPr lang="en-US" sz="1100" b="1" i="0" u="sng" strike="noStrike" cap="none" dirty="0">
+                <a:solidFill>
+                  <a:srgbClr val="000000"/>
+                </a:solidFill>
+                <a:effectLst/>
+                <a:latin typeface="Arial"/>
+                <a:ea typeface="Arial"/>
+                <a:cs typeface="Arial"/>
+                <a:sym typeface="Arial"/>
+              </a:rPr>
+              <a:t>Summary Comparison</a:t>
+            </a:r>
+          </a:p>
+          <a:p>
+            <a:pPr marL="0" lvl="0" indent="0" algn="l" rtl="0">
+              <a:spcBef>
+                <a:spcPts val="0"/>
+              </a:spcBef>
+              <a:spcAft>
+                <a:spcPts val="0"/>
+              </a:spcAft>
+              <a:buNone/>
+            </a:pPr>
+            <a:r>
+              <a:rPr lang="en-US" sz="1100" b="1" i="0" u="none" strike="noStrike" cap="none" dirty="0">
+                <a:solidFill>
+                  <a:srgbClr val="000000"/>
+                </a:solidFill>
+                <a:effectLst/>
+                <a:latin typeface="Arial"/>
+                <a:ea typeface="Arial"/>
+                <a:cs typeface="Arial"/>
+                <a:sym typeface="Arial"/>
+              </a:rPr>
+              <a:t>TCP Connection</a:t>
+            </a:r>
+          </a:p>
+          <a:p>
+            <a:pPr marL="0" lvl="0" indent="0" algn="l" rtl="0">
+              <a:spcBef>
+                <a:spcPts val="0"/>
+              </a:spcBef>
+              <a:spcAft>
+                <a:spcPts val="0"/>
+              </a:spcAft>
+              <a:buNone/>
+            </a:pPr>
+            <a:r>
+              <a:rPr lang="en-US" sz="1100" b="1" i="0" u="none" strike="noStrike" cap="none" dirty="0">
+                <a:solidFill>
+                  <a:srgbClr val="000000"/>
+                </a:solidFill>
+                <a:effectLst/>
+                <a:latin typeface="Arial"/>
+                <a:ea typeface="Arial"/>
+                <a:cs typeface="Arial"/>
+                <a:sym typeface="Arial"/>
+              </a:rPr>
+              <a:t>Handshake: </a:t>
+            </a:r>
+            <a:r>
+              <a:rPr lang="en-US" sz="1100" b="0" i="0" u="none" strike="noStrike" cap="none" dirty="0">
+                <a:solidFill>
+                  <a:srgbClr val="000000"/>
+                </a:solidFill>
+                <a:effectLst/>
+                <a:latin typeface="Arial"/>
+                <a:ea typeface="Arial"/>
+                <a:cs typeface="Arial"/>
+                <a:sym typeface="Arial"/>
+              </a:rPr>
+              <a:t>3-way (SYN, SYN-ACK, ACK)</a:t>
+            </a:r>
+            <a:endParaRPr lang="en-US" sz="1100" b="1" i="0" u="none" strike="noStrike" cap="none" dirty="0">
+              <a:solidFill>
+                <a:srgbClr val="000000"/>
+              </a:solidFill>
+              <a:effectLst/>
+              <a:latin typeface="Arial"/>
+              <a:ea typeface="Arial"/>
+              <a:cs typeface="Arial"/>
+              <a:sym typeface="Arial"/>
+            </a:endParaRPr>
+          </a:p>
+          <a:p>
+            <a:pPr marL="0" lvl="0" indent="0" algn="l" rtl="0">
+              <a:spcBef>
+                <a:spcPts val="0"/>
+              </a:spcBef>
+              <a:spcAft>
+                <a:spcPts val="0"/>
+              </a:spcAft>
+              <a:buNone/>
+            </a:pPr>
+            <a:r>
+              <a:rPr lang="en-US" sz="1100" b="1" i="0" u="none" strike="noStrike" cap="none" dirty="0">
+                <a:solidFill>
+                  <a:srgbClr val="000000"/>
+                </a:solidFill>
+                <a:effectLst/>
+                <a:latin typeface="Arial"/>
+                <a:ea typeface="Arial"/>
+                <a:cs typeface="Arial"/>
+                <a:sym typeface="Arial"/>
+              </a:rPr>
+              <a:t>Kernel State: </a:t>
+            </a:r>
+            <a:r>
+              <a:rPr lang="en-US" sz="1100" b="0" i="0" u="none" strike="noStrike" cap="none" dirty="0">
+                <a:solidFill>
+                  <a:srgbClr val="000000"/>
+                </a:solidFill>
+                <a:effectLst/>
+                <a:latin typeface="Arial"/>
+                <a:ea typeface="Arial"/>
+                <a:cs typeface="Arial"/>
+                <a:sym typeface="Arial"/>
+              </a:rPr>
+              <a:t>Maintains sequence numbers/windows</a:t>
+            </a:r>
+          </a:p>
+          <a:p>
+            <a:pPr marL="0" lvl="0" indent="0" algn="l" rtl="0">
+              <a:spcBef>
+                <a:spcPts val="0"/>
+              </a:spcBef>
+              <a:spcAft>
+                <a:spcPts val="0"/>
+              </a:spcAft>
+              <a:buNone/>
+            </a:pPr>
+            <a:r>
+              <a:rPr lang="en-US" sz="1100" b="1" i="0" u="none" strike="noStrike" cap="none" dirty="0">
+                <a:solidFill>
+                  <a:srgbClr val="000000"/>
+                </a:solidFill>
+                <a:effectLst/>
+                <a:latin typeface="Arial"/>
+                <a:ea typeface="Arial"/>
+                <a:cs typeface="Arial"/>
+                <a:sym typeface="Arial"/>
+              </a:rPr>
+              <a:t>Termination: </a:t>
+            </a:r>
+            <a:r>
+              <a:rPr lang="en-US" sz="1100" b="0" i="0" u="none" strike="noStrike" cap="none" dirty="0">
+                <a:solidFill>
+                  <a:srgbClr val="000000"/>
+                </a:solidFill>
+                <a:effectLst/>
+                <a:latin typeface="Arial"/>
+                <a:ea typeface="Arial"/>
+                <a:cs typeface="Arial"/>
+                <a:sym typeface="Arial"/>
+              </a:rPr>
+              <a:t>4-way (FIN/ACK)</a:t>
+            </a:r>
+          </a:p>
+          <a:p>
+            <a:pPr marL="0" lvl="0" indent="0" algn="l" rtl="0">
+              <a:spcBef>
+                <a:spcPts val="0"/>
+              </a:spcBef>
+              <a:spcAft>
+                <a:spcPts val="0"/>
+              </a:spcAft>
+              <a:buNone/>
+            </a:pPr>
+            <a:r>
+              <a:rPr lang="en-US" sz="1100" b="1" i="0" u="none" strike="noStrike" cap="none" dirty="0">
+                <a:solidFill>
+                  <a:srgbClr val="000000"/>
+                </a:solidFill>
+                <a:effectLst/>
+                <a:latin typeface="Arial"/>
+                <a:ea typeface="Arial"/>
+                <a:cs typeface="Arial"/>
+                <a:sym typeface="Arial"/>
+              </a:rPr>
+              <a:t>Reliability: </a:t>
+            </a:r>
+            <a:r>
+              <a:rPr lang="en-US" sz="1100" b="0" i="0" u="none" strike="noStrike" cap="none" dirty="0">
+                <a:solidFill>
+                  <a:srgbClr val="000000"/>
+                </a:solidFill>
+                <a:effectLst/>
+                <a:latin typeface="Arial"/>
+                <a:ea typeface="Arial"/>
+                <a:cs typeface="Arial"/>
+                <a:sym typeface="Arial"/>
+              </a:rPr>
+              <a:t>Guaranteed delivery/ordering</a:t>
+            </a:r>
+          </a:p>
+          <a:p>
+            <a:pPr marL="0" lvl="0" indent="0" algn="l" rtl="0">
+              <a:spcBef>
+                <a:spcPts val="0"/>
+              </a:spcBef>
+              <a:spcAft>
+                <a:spcPts val="0"/>
+              </a:spcAft>
+              <a:buNone/>
+            </a:pPr>
             <a:endParaRPr lang="en-US" dirty="0"/>
+          </a:p>
+          <a:p>
+            <a:pPr marL="0" lvl="0" indent="0" algn="l" rtl="0">
+              <a:spcBef>
+                <a:spcPts val="0"/>
+              </a:spcBef>
+              <a:spcAft>
+                <a:spcPts val="0"/>
+              </a:spcAft>
+              <a:buNone/>
+            </a:pPr>
+            <a:r>
+              <a:rPr lang="en-US" sz="1100" b="1" i="0" u="none" strike="noStrike" cap="none" dirty="0">
+                <a:solidFill>
+                  <a:srgbClr val="000000"/>
+                </a:solidFill>
+                <a:effectLst/>
+                <a:latin typeface="Arial"/>
+                <a:ea typeface="Arial"/>
+                <a:cs typeface="Arial"/>
+                <a:sym typeface="Arial"/>
+              </a:rPr>
+              <a:t>UDP "Connection"</a:t>
+            </a:r>
+          </a:p>
+          <a:p>
+            <a:pPr marL="0" lvl="0" indent="0" algn="l" rtl="0">
+              <a:spcBef>
+                <a:spcPts val="0"/>
+              </a:spcBef>
+              <a:spcAft>
+                <a:spcPts val="0"/>
+              </a:spcAft>
+              <a:buNone/>
+            </a:pPr>
+            <a:r>
+              <a:rPr lang="en-US" sz="1100" b="1" i="0" u="none" strike="noStrike" cap="none" dirty="0">
+                <a:solidFill>
+                  <a:srgbClr val="000000"/>
+                </a:solidFill>
+                <a:effectLst/>
+                <a:latin typeface="Arial"/>
+                <a:ea typeface="Arial"/>
+                <a:cs typeface="Arial"/>
+                <a:sym typeface="Arial"/>
+              </a:rPr>
+              <a:t>Handshake</a:t>
+            </a:r>
+            <a:r>
+              <a:rPr lang="en-US" sz="1100" b="0" i="0" u="none" strike="noStrike" cap="none" dirty="0">
+                <a:solidFill>
+                  <a:srgbClr val="000000"/>
+                </a:solidFill>
+                <a:effectLst/>
+                <a:latin typeface="Arial"/>
+                <a:ea typeface="Arial"/>
+                <a:cs typeface="Arial"/>
+                <a:sym typeface="Arial"/>
+              </a:rPr>
+              <a:t>: None</a:t>
+            </a:r>
+          </a:p>
+          <a:p>
+            <a:pPr marL="0" lvl="0" indent="0" algn="l" rtl="0">
+              <a:spcBef>
+                <a:spcPts val="0"/>
+              </a:spcBef>
+              <a:spcAft>
+                <a:spcPts val="0"/>
+              </a:spcAft>
+              <a:buNone/>
+            </a:pPr>
+            <a:r>
+              <a:rPr lang="en-US" sz="1100" b="1" i="0" u="none" strike="noStrike" cap="none" dirty="0">
+                <a:solidFill>
+                  <a:srgbClr val="000000"/>
+                </a:solidFill>
+                <a:effectLst/>
+                <a:latin typeface="Arial"/>
+                <a:ea typeface="Arial"/>
+                <a:cs typeface="Arial"/>
+                <a:sym typeface="Arial"/>
+              </a:rPr>
+              <a:t>Kernel State: </a:t>
+            </a:r>
+            <a:r>
+              <a:rPr lang="en-US" sz="1100" b="0" i="0" u="none" strike="noStrike" cap="none" dirty="0">
+                <a:solidFill>
+                  <a:srgbClr val="000000"/>
+                </a:solidFill>
+                <a:effectLst/>
+                <a:latin typeface="Arial"/>
+                <a:ea typeface="Arial"/>
+                <a:cs typeface="Arial"/>
+                <a:sym typeface="Arial"/>
+              </a:rPr>
+              <a:t>None (unless filtered by connect())</a:t>
+            </a:r>
+          </a:p>
+          <a:p>
+            <a:pPr marL="0" lvl="0" indent="0" algn="l" rtl="0">
+              <a:spcBef>
+                <a:spcPts val="0"/>
+              </a:spcBef>
+              <a:spcAft>
+                <a:spcPts val="0"/>
+              </a:spcAft>
+              <a:buNone/>
+            </a:pPr>
+            <a:r>
+              <a:rPr lang="en-US" sz="1100" b="1" i="0" u="none" strike="noStrike" cap="none" dirty="0">
+                <a:solidFill>
+                  <a:srgbClr val="000000"/>
+                </a:solidFill>
+                <a:effectLst/>
+                <a:latin typeface="Arial"/>
+                <a:ea typeface="Arial"/>
+                <a:cs typeface="Arial"/>
+                <a:sym typeface="Arial"/>
+              </a:rPr>
+              <a:t>Termination: </a:t>
+            </a:r>
+            <a:r>
+              <a:rPr lang="en-US" sz="1100" b="0" i="0" u="none" strike="noStrike" cap="none" dirty="0">
+                <a:solidFill>
+                  <a:srgbClr val="000000"/>
+                </a:solidFill>
+                <a:effectLst/>
+                <a:latin typeface="Arial"/>
+                <a:ea typeface="Arial"/>
+                <a:cs typeface="Arial"/>
+                <a:sym typeface="Arial"/>
+              </a:rPr>
+              <a:t>Just stop sending data</a:t>
+            </a:r>
+          </a:p>
+          <a:p>
+            <a:pPr marL="0" lvl="0" indent="0" algn="l" rtl="0">
+              <a:spcBef>
+                <a:spcPts val="0"/>
+              </a:spcBef>
+              <a:spcAft>
+                <a:spcPts val="0"/>
+              </a:spcAft>
+              <a:buNone/>
+            </a:pPr>
+            <a:r>
+              <a:rPr lang="en-US" sz="1100" b="1" i="0" u="none" strike="noStrike" cap="none" dirty="0">
+                <a:solidFill>
+                  <a:srgbClr val="000000"/>
+                </a:solidFill>
+                <a:effectLst/>
+                <a:latin typeface="Arial"/>
+                <a:ea typeface="Arial"/>
+                <a:cs typeface="Arial"/>
+                <a:sym typeface="Arial"/>
+              </a:rPr>
+              <a:t>Reliability: </a:t>
+            </a:r>
+            <a:r>
+              <a:rPr lang="en-US" sz="1100" b="0" i="0" u="none" strike="noStrike" cap="none" dirty="0">
+                <a:solidFill>
+                  <a:srgbClr val="000000"/>
+                </a:solidFill>
+                <a:effectLst/>
+                <a:latin typeface="Arial"/>
+                <a:ea typeface="Arial"/>
+                <a:cs typeface="Arial"/>
+                <a:sym typeface="Arial"/>
+              </a:rPr>
+              <a:t>Best effort (packets can be lost or reordered)</a:t>
+            </a:r>
           </a:p>
           <a:p>
             <a:pPr marL="0" lvl="0" indent="0" algn="l" rtl="0">
@@ -1584,6 +2055,21 @@
               </a:spcAft>
             </a:pPr>
             <a:r>
+              <a:rPr lang="en-US" dirty="0"/>
+              <a:t>UDP is </a:t>
+            </a:r>
+            <a:r>
+              <a:rPr lang="en-US" b="1" dirty="0"/>
+              <a:t>message-oriented</a:t>
+            </a:r>
+            <a:r>
+              <a:rPr lang="en-US" dirty="0"/>
+              <a:t>. </a:t>
+            </a:r>
+            <a:br>
+              <a:rPr lang="en-US" dirty="0"/>
+            </a:br>
+            <a:r>
               <a:rPr lang="en-US" sz="1100" b="0" i="0" u="none" strike="noStrike" cap="none" dirty="0">
                 <a:solidFill>
                   <a:srgbClr val="000000"/>
@@ -1594,7 +2080,33 @@
                 <a:cs typeface="Arial"/>
                 <a:sym typeface="Arial"/>
               </a:rPr>
-              <a:t>Sends "datagrams" as discrete, independent packets that may be lost or arrive out of order.</a:t>
+              <a:t>Sends "</a:t>
+            </a:r>
+            <a:r>
+              <a:rPr lang="en-US" sz="1100" b="1" i="0" u="none" strike="noStrike" cap="none" dirty="0">
+                <a:solidFill>
+                  <a:srgbClr val="000000"/>
+                </a:solidFill>
+                <a:effectLst/>
+                <a:latin typeface="Arial"/>
+                <a:ea typeface="Arial"/>
+                <a:cs typeface="Arial"/>
+                <a:sym typeface="Arial"/>
+              </a:rPr>
+              <a:t>datagrams</a:t>
+            </a:r>
+            <a:r>
+              <a:rPr lang="en-US" sz="1100" b="0" i="0" u="none" strike="noStrike" cap="none" dirty="0">
+                <a:solidFill>
+                  <a:srgbClr val="000000"/>
+                </a:solidFill>
+                <a:effectLst/>
+                <a:latin typeface="Arial"/>
+                <a:ea typeface="Arial"/>
+                <a:cs typeface="Arial"/>
+                <a:sym typeface="Arial"/>
+              </a:rPr>
+              <a:t>" as discrete, independent packets of data that may be lost or arrive out of order.</a:t>
             </a:r>
           </a:p>
           <a:p>
@@ -1632,6 +2144,643 @@
             </a:r>
           </a:p>
           <a:p>
+            <a:pPr marL="0" marR="0" lvl="0" indent="0" algn="l" defTabSz="914400" rtl="0" eaLnBrk="1" fontAlgn="auto" latinLnBrk="0" hangingPunct="1">
+              <a:lnSpc>
+                <a:spcPct val="100000"/>
+              </a:lnSpc>
+              <a:spcBef>
+                <a:spcPts val="0"/>
+              </a:spcBef>
+              <a:spcAft>
+                <a:spcPts val="0"/>
+              </a:spcAft>
+              <a:buClr>
+                <a:srgbClr val="000000"/>
+              </a:buClr>
+              <a:buSzPts val="1100"/>
+              <a:buFont typeface="Arial"/>
+              <a:buNone/>
+              <a:tabLst/>
+              <a:defRPr/>
+            </a:pPr>
+            <a:endParaRPr lang="en-US" sz="1100" b="0" i="0" u="none" strike="noStrike" cap="none" dirty="0">
+              <a:solidFill>
+                <a:srgbClr val="000000"/>
+              </a:solidFill>
+              <a:effectLst/>
+              <a:latin typeface="Arial"/>
+              <a:cs typeface="Arial"/>
+              <a:sym typeface="Arial"/>
+            </a:endParaRPr>
+          </a:p>
+          <a:p>
+            <a:pPr marL="0" marR="0" lvl="0" indent="0" algn="l" defTabSz="914400" rtl="0" eaLnBrk="1" fontAlgn="auto" latinLnBrk="0" hangingPunct="1">
+              <a:lnSpc>
+                <a:spcPct val="100000"/>
+              </a:lnSpc>
+              <a:spcBef>
+                <a:spcPts val="0"/>
+              </a:spcBef>
+              <a:spcAft>
+                <a:spcPts val="0"/>
+              </a:spcAft>
+              <a:buClr>
+                <a:srgbClr val="000000"/>
+              </a:buClr>
+              <a:buSzPts val="1100"/>
+              <a:buFont typeface="Arial"/>
+              <a:buNone/>
+              <a:tabLst/>
+              <a:defRPr/>
+            </a:pPr>
+            <a:r>
+              <a:rPr lang="en-US" b="1" dirty="0"/>
+              <a:t>The Standard Workflow (</a:t>
+            </a:r>
+            <a:r>
+              <a:rPr lang="en-US" b="1" dirty="0" err="1"/>
+              <a:t>Sendto</a:t>
+            </a:r>
+            <a:r>
+              <a:rPr lang="en-US" b="1" dirty="0"/>
+              <a:t>/</a:t>
+            </a:r>
+            <a:r>
+              <a:rPr lang="en-US" b="1" dirty="0" err="1"/>
+              <a:t>Recvfrom</a:t>
+            </a:r>
+            <a:r>
+              <a:rPr lang="en-US" b="1" dirty="0"/>
+              <a:t>)</a:t>
+            </a:r>
+            <a:endParaRPr lang="en-US" sz="1100" b="1" i="0" u="none" strike="noStrike" cap="none" dirty="0">
+              <a:solidFill>
+                <a:srgbClr val="000000"/>
+              </a:solidFill>
+              <a:effectLst/>
+              <a:latin typeface="Arial"/>
+              <a:cs typeface="Arial"/>
+              <a:sym typeface="Arial"/>
+            </a:endParaRPr>
+          </a:p>
+          <a:p>
+            <a:pPr marL="0" marR="0" lvl="0" indent="0" algn="l" defTabSz="914400" rtl="0" eaLnBrk="1" fontAlgn="auto" latinLnBrk="0" hangingPunct="1">
+              <a:lnSpc>
+                <a:spcPct val="100000"/>
+              </a:lnSpc>
+              <a:spcBef>
+                <a:spcPts val="0"/>
+              </a:spcBef>
+              <a:spcAft>
+                <a:spcPts val="0"/>
+              </a:spcAft>
+              <a:buClr>
+                <a:srgbClr val="000000"/>
+              </a:buClr>
+              <a:buSzPts val="1100"/>
+              <a:buFont typeface="Arial"/>
+              <a:buNone/>
+              <a:tabLst/>
+              <a:defRPr/>
+            </a:pPr>
+            <a:r>
+              <a:rPr lang="en-US" dirty="0"/>
+              <a:t>In the most common UDP implementation, the kernel acts as a simple pass-through.</a:t>
+            </a:r>
+          </a:p>
+          <a:p>
+            <a:pPr marL="171450" marR="0" lvl="0" indent="-171450" algn="l" defTabSz="914400" rtl="0" eaLnBrk="1" fontAlgn="auto" latinLnBrk="0" hangingPunct="1">
+              <a:lnSpc>
+                <a:spcPct val="100000"/>
+              </a:lnSpc>
+              <a:spcBef>
+                <a:spcPts val="0"/>
+              </a:spcBef>
+              <a:spcAft>
+                <a:spcPts val="0"/>
+              </a:spcAft>
+              <a:buClr>
+                <a:srgbClr val="000000"/>
+              </a:buClr>
+              <a:buSzPts val="1100"/>
+              <a:tabLst/>
+              <a:defRPr/>
+            </a:pPr>
+            <a:r>
+              <a:rPr lang="en-US" b="1" dirty="0"/>
+              <a:t>Socket Creation:</a:t>
+            </a:r>
+            <a:r>
+              <a:rPr lang="en-US" dirty="0"/>
+              <a:t> </a:t>
+            </a:r>
+            <a:br>
+              <a:rPr lang="en-US" dirty="0"/>
+            </a:br>
+            <a:r>
+              <a:rPr lang="en-US" dirty="0"/>
+              <a:t>You create a socket using </a:t>
+            </a:r>
+            <a:r>
+              <a:rPr lang="en-US" sz="1100" b="0" i="0" u="none" strike="noStrike" cap="none" dirty="0">
+                <a:solidFill>
+                  <a:srgbClr val="000000"/>
+                </a:solidFill>
+                <a:latin typeface="Arial"/>
+                <a:ea typeface="Arial"/>
+                <a:cs typeface="Arial"/>
+                <a:sym typeface="Arial"/>
+              </a:rPr>
+              <a:t>SOCK_DGRAM</a:t>
+            </a:r>
+            <a:r>
+              <a:rPr lang="en-US" dirty="0"/>
+              <a:t>.</a:t>
+            </a:r>
+          </a:p>
+          <a:p>
+            <a:pPr marL="171450" marR="0" lvl="0" indent="-171450" algn="l" defTabSz="914400" rtl="0" eaLnBrk="1" fontAlgn="auto" latinLnBrk="0" hangingPunct="1">
+              <a:lnSpc>
+                <a:spcPct val="100000"/>
+              </a:lnSpc>
+              <a:spcBef>
+                <a:spcPts val="0"/>
+              </a:spcBef>
+              <a:spcAft>
+                <a:spcPts val="0"/>
+              </a:spcAft>
+              <a:buClr>
+                <a:srgbClr val="000000"/>
+              </a:buClr>
+              <a:buSzPts val="1100"/>
+              <a:tabLst/>
+              <a:defRPr/>
+            </a:pPr>
+            <a:r>
+              <a:rPr lang="en-US" b="1" dirty="0"/>
+              <a:t>Binding (Receiver):</a:t>
+            </a:r>
+            <a:r>
+              <a:rPr lang="en-US" dirty="0"/>
+              <a:t> </a:t>
+            </a:r>
+            <a:br>
+              <a:rPr lang="en-US" dirty="0"/>
+            </a:br>
+            <a:r>
+              <a:rPr lang="en-US" dirty="0"/>
+              <a:t>The receiver calls </a:t>
+            </a:r>
+            <a:r>
+              <a:rPr lang="en-US" sz="1100" b="0" i="0" u="none" strike="noStrike" cap="none" dirty="0">
+                <a:solidFill>
+                  <a:srgbClr val="000000"/>
+                </a:solidFill>
+                <a:latin typeface="Arial"/>
+                <a:ea typeface="Arial"/>
+                <a:cs typeface="Arial"/>
+                <a:sym typeface="Arial"/>
+              </a:rPr>
+              <a:t>bind()</a:t>
+            </a:r>
+            <a:r>
+              <a:rPr lang="en-US" dirty="0"/>
+              <a:t> to tell the OS, "Any UDP packets arriving on Port X should be given to me.“</a:t>
+            </a:r>
+          </a:p>
+          <a:p>
+            <a:pPr marL="171450" marR="0" lvl="0" indent="-171450" algn="l" defTabSz="914400" rtl="0" eaLnBrk="1" fontAlgn="auto" latinLnBrk="0" hangingPunct="1">
+              <a:lnSpc>
+                <a:spcPct val="100000"/>
+              </a:lnSpc>
+              <a:spcBef>
+                <a:spcPts val="0"/>
+              </a:spcBef>
+              <a:spcAft>
+                <a:spcPts val="0"/>
+              </a:spcAft>
+              <a:buClr>
+                <a:srgbClr val="000000"/>
+              </a:buClr>
+              <a:buSzPts val="1100"/>
+              <a:tabLst/>
+              <a:defRPr/>
+            </a:pPr>
+            <a:r>
+              <a:rPr lang="en-US" b="1" dirty="0"/>
+              <a:t>Data Transfer:</a:t>
+            </a:r>
+            <a:r>
+              <a:rPr lang="en-US" dirty="0"/>
+              <a:t> </a:t>
+            </a:r>
+            <a:br>
+              <a:rPr lang="en-US" dirty="0"/>
+            </a:br>
+            <a:r>
+              <a:rPr lang="en-US" dirty="0"/>
+              <a:t>The sender uses </a:t>
+            </a:r>
+            <a:r>
+              <a:rPr lang="en-US" sz="1100" b="0" i="0" u="none" strike="noStrike" cap="none" dirty="0" err="1">
+                <a:solidFill>
+                  <a:srgbClr val="000000"/>
+                </a:solidFill>
+                <a:latin typeface="Arial"/>
+                <a:ea typeface="Arial"/>
+                <a:cs typeface="Arial"/>
+                <a:sym typeface="Arial"/>
+              </a:rPr>
+              <a:t>sendto</a:t>
+            </a:r>
+            <a:r>
+              <a:rPr lang="en-US" sz="1100" b="0" i="0" u="none" strike="noStrike" cap="none" dirty="0">
+                <a:solidFill>
+                  <a:srgbClr val="000000"/>
+                </a:solidFill>
+                <a:latin typeface="Arial"/>
+                <a:ea typeface="Arial"/>
+                <a:cs typeface="Arial"/>
+                <a:sym typeface="Arial"/>
+              </a:rPr>
+              <a:t>()</a:t>
+            </a:r>
+            <a:r>
+              <a:rPr lang="en-US" dirty="0"/>
+              <a:t>, specifying the destination IP and Port every single time.</a:t>
+            </a:r>
+            <a:br>
+              <a:rPr lang="en-US" dirty="0"/>
+            </a:br>
+            <a:r>
+              <a:rPr lang="en-US" dirty="0"/>
+              <a:t>The receiver uses </a:t>
+            </a:r>
+            <a:r>
+              <a:rPr lang="en-US" sz="1100" b="0" i="0" u="none" strike="noStrike" cap="none" dirty="0" err="1">
+                <a:solidFill>
+                  <a:srgbClr val="000000"/>
+                </a:solidFill>
+                <a:latin typeface="Arial"/>
+                <a:ea typeface="Arial"/>
+                <a:cs typeface="Arial"/>
+                <a:sym typeface="Arial"/>
+              </a:rPr>
+              <a:t>recvfrom</a:t>
+            </a:r>
+            <a:r>
+              <a:rPr lang="en-US" sz="1100" b="0" i="0" u="none" strike="noStrike" cap="none" dirty="0">
+                <a:solidFill>
+                  <a:srgbClr val="000000"/>
+                </a:solidFill>
+                <a:latin typeface="Arial"/>
+                <a:ea typeface="Arial"/>
+                <a:cs typeface="Arial"/>
+                <a:sym typeface="Arial"/>
+              </a:rPr>
+              <a:t>()</a:t>
+            </a:r>
+            <a:r>
+              <a:rPr lang="en-US" dirty="0"/>
+              <a:t>, which provides the sender's address along with the data so the receiver knows where it came from.</a:t>
+            </a:r>
+          </a:p>
+          <a:p>
+            <a:pPr marL="0" marR="0" lvl="0" indent="0" algn="l" defTabSz="914400" rtl="0" eaLnBrk="1" fontAlgn="auto" latinLnBrk="0" hangingPunct="1">
+              <a:lnSpc>
+                <a:spcPct val="100000"/>
+              </a:lnSpc>
+              <a:spcBef>
+                <a:spcPts val="0"/>
+              </a:spcBef>
+              <a:spcAft>
+                <a:spcPts val="0"/>
+              </a:spcAft>
+              <a:buClr>
+                <a:srgbClr val="000000"/>
+              </a:buClr>
+              <a:buSzPts val="1100"/>
+              <a:buNone/>
+              <a:tabLst/>
+              <a:defRPr/>
+            </a:pPr>
+            <a:endParaRPr lang="en-US" b="1" dirty="0"/>
+          </a:p>
+          <a:p>
+            <a:pPr marL="0" marR="0" lvl="0" indent="0" algn="l" defTabSz="914400" rtl="0" eaLnBrk="1" fontAlgn="auto" latinLnBrk="0" hangingPunct="1">
+              <a:lnSpc>
+                <a:spcPct val="100000"/>
+              </a:lnSpc>
+              <a:spcBef>
+                <a:spcPts val="0"/>
+              </a:spcBef>
+              <a:spcAft>
+                <a:spcPts val="0"/>
+              </a:spcAft>
+              <a:buClr>
+                <a:srgbClr val="000000"/>
+              </a:buClr>
+              <a:buSzPts val="1100"/>
+              <a:buNone/>
+              <a:tabLst/>
+              <a:defRPr/>
+            </a:pPr>
+            <a:r>
+              <a:rPr lang="en-US" b="1" dirty="0"/>
+              <a:t>User Mode vs. Kernel Mode for UDP</a:t>
+            </a:r>
+          </a:p>
+          <a:p>
+            <a:pPr marL="0" marR="0" lvl="0" indent="0" algn="l" defTabSz="914400" rtl="0" eaLnBrk="1" fontAlgn="auto" latinLnBrk="0" hangingPunct="1">
+              <a:lnSpc>
+                <a:spcPct val="100000"/>
+              </a:lnSpc>
+              <a:spcBef>
+                <a:spcPts val="0"/>
+              </a:spcBef>
+              <a:spcAft>
+                <a:spcPts val="0"/>
+              </a:spcAft>
+              <a:buClr>
+                <a:srgbClr val="000000"/>
+              </a:buClr>
+              <a:buSzPts val="1100"/>
+              <a:buNone/>
+              <a:tabLst/>
+              <a:defRPr/>
+            </a:pPr>
+            <a:r>
+              <a:rPr lang="en-US" dirty="0"/>
+              <a:t>Because there is no handshake, the overhead is much lower than TCP:</a:t>
+            </a:r>
+          </a:p>
+          <a:p>
+            <a:pPr marL="171450" marR="0" lvl="0" indent="-171450" algn="l" defTabSz="914400" rtl="0" eaLnBrk="1" fontAlgn="auto" latinLnBrk="0" hangingPunct="1">
+              <a:lnSpc>
+                <a:spcPct val="100000"/>
+              </a:lnSpc>
+              <a:spcBef>
+                <a:spcPts val="0"/>
+              </a:spcBef>
+              <a:spcAft>
+                <a:spcPts val="0"/>
+              </a:spcAft>
+              <a:buClr>
+                <a:srgbClr val="000000"/>
+              </a:buClr>
+              <a:buSzPts val="1100"/>
+              <a:tabLst/>
+              <a:defRPr/>
+            </a:pPr>
+            <a:r>
+              <a:rPr lang="en-US" b="1" dirty="0"/>
+              <a:t>User Mode:</a:t>
+            </a:r>
+            <a:r>
+              <a:rPr lang="en-US" dirty="0"/>
+              <a:t> </a:t>
+            </a:r>
+            <a:br>
+              <a:rPr lang="en-US" dirty="0"/>
+            </a:br>
+            <a:r>
+              <a:rPr lang="en-US" dirty="0"/>
+              <a:t>The application simply drops a "datagram" (a block of data) into the socket.</a:t>
+            </a:r>
+          </a:p>
+          <a:p>
+            <a:pPr marL="171450" marR="0" lvl="0" indent="-171450" algn="l" defTabSz="914400" rtl="0" eaLnBrk="1" fontAlgn="auto" latinLnBrk="0" hangingPunct="1">
+              <a:lnSpc>
+                <a:spcPct val="100000"/>
+              </a:lnSpc>
+              <a:spcBef>
+                <a:spcPts val="0"/>
+              </a:spcBef>
+              <a:spcAft>
+                <a:spcPts val="0"/>
+              </a:spcAft>
+              <a:buClr>
+                <a:srgbClr val="000000"/>
+              </a:buClr>
+              <a:buSzPts val="1100"/>
+              <a:tabLst/>
+              <a:defRPr/>
+            </a:pPr>
+            <a:r>
+              <a:rPr lang="en-US" b="1" dirty="0"/>
+              <a:t>Kernel Mode:</a:t>
+            </a:r>
+            <a:r>
+              <a:rPr lang="en-US" dirty="0"/>
+              <a:t> </a:t>
+            </a:r>
+            <a:br>
+              <a:rPr lang="en-US" dirty="0"/>
+            </a:br>
+            <a:r>
+              <a:rPr lang="en-US" dirty="0"/>
+              <a:t>The kernel wraps the data in a UDP header (which is only 8 bytes) and an IP header, </a:t>
+            </a:r>
+            <a:br>
+              <a:rPr lang="en-US" dirty="0"/>
+            </a:br>
+            <a:r>
+              <a:rPr lang="en-US" dirty="0"/>
+              <a:t>then pushes it directly to the NIC driver. </a:t>
+            </a:r>
+            <a:br>
+              <a:rPr lang="en-US" dirty="0"/>
+            </a:br>
+            <a:r>
+              <a:rPr lang="en-US" dirty="0"/>
+              <a:t>There is no buffering for retransmission or flow control logic.</a:t>
+            </a:r>
+          </a:p>
+          <a:p>
+            <a:pPr marL="0" lvl="0" indent="0" algn="l" rtl="0">
+              <a:spcBef>
+                <a:spcPts val="0"/>
+              </a:spcBef>
+              <a:spcAft>
+                <a:spcPts val="0"/>
+              </a:spcAft>
+              <a:buNone/>
+            </a:pPr>
+            <a:endParaRPr lang="en-US" dirty="0"/>
+          </a:p>
+          <a:p>
+            <a:pPr marL="0" lvl="0" indent="0" algn="l" rtl="0">
+              <a:spcBef>
+                <a:spcPts val="0"/>
+              </a:spcBef>
+              <a:spcAft>
+                <a:spcPts val="0"/>
+              </a:spcAft>
+              <a:buNone/>
+            </a:pPr>
+            <a:r>
+              <a:rPr lang="en-US" sz="1100" b="1" i="0" u="none" strike="noStrike" cap="none" dirty="0">
+                <a:solidFill>
+                  <a:srgbClr val="000000"/>
+                </a:solidFill>
+                <a:effectLst/>
+                <a:latin typeface="Arial"/>
+                <a:ea typeface="Arial"/>
+                <a:cs typeface="Arial"/>
+                <a:sym typeface="Arial"/>
+              </a:rPr>
+              <a:t>UDP “Connection”</a:t>
+            </a:r>
+          </a:p>
+          <a:p>
+            <a:pPr marL="0" lvl="0" indent="0" algn="l" rtl="0">
+              <a:spcBef>
+                <a:spcPts val="0"/>
+              </a:spcBef>
+              <a:spcAft>
+                <a:spcPts val="0"/>
+              </a:spcAft>
+              <a:buNone/>
+            </a:pPr>
+            <a:r>
+              <a:rPr lang="en-US" sz="1100" b="1" i="0" u="none" strike="noStrike" cap="none" dirty="0">
+                <a:solidFill>
+                  <a:srgbClr val="000000"/>
+                </a:solidFill>
+                <a:effectLst/>
+                <a:latin typeface="Arial"/>
+                <a:ea typeface="Arial"/>
+                <a:cs typeface="Arial"/>
+                <a:sym typeface="Arial"/>
+              </a:rPr>
+              <a:t>Handshake</a:t>
+            </a:r>
+            <a:r>
+              <a:rPr lang="en-US" sz="1100" b="0" i="0" u="none" strike="noStrike" cap="none" dirty="0">
+                <a:solidFill>
+                  <a:srgbClr val="000000"/>
+                </a:solidFill>
+                <a:effectLst/>
+                <a:latin typeface="Arial"/>
+                <a:ea typeface="Arial"/>
+                <a:cs typeface="Arial"/>
+                <a:sym typeface="Arial"/>
+              </a:rPr>
+              <a:t>: None</a:t>
+            </a:r>
+          </a:p>
+          <a:p>
+            <a:pPr marL="0" lvl="0" indent="0" algn="l" rtl="0">
+              <a:spcBef>
+                <a:spcPts val="0"/>
+              </a:spcBef>
+              <a:spcAft>
+                <a:spcPts val="0"/>
+              </a:spcAft>
+              <a:buNone/>
+            </a:pPr>
+            <a:r>
+              <a:rPr lang="en-US" sz="1100" b="1" i="0" u="none" strike="noStrike" cap="none" dirty="0">
+                <a:solidFill>
+                  <a:srgbClr val="000000"/>
+                </a:solidFill>
+                <a:effectLst/>
+                <a:latin typeface="Arial"/>
+                <a:ea typeface="Arial"/>
+                <a:cs typeface="Arial"/>
+                <a:sym typeface="Arial"/>
+              </a:rPr>
+              <a:t>Kernel State: </a:t>
+            </a:r>
+            <a:r>
+              <a:rPr lang="en-US" sz="1100" b="0" i="0" u="none" strike="noStrike" cap="none" dirty="0">
+                <a:solidFill>
+                  <a:srgbClr val="000000"/>
+                </a:solidFill>
+                <a:effectLst/>
+                <a:latin typeface="Arial"/>
+                <a:ea typeface="Arial"/>
+                <a:cs typeface="Arial"/>
+                <a:sym typeface="Arial"/>
+              </a:rPr>
+              <a:t>None (unless filtered by connect())</a:t>
+            </a:r>
+          </a:p>
+          <a:p>
+            <a:pPr marL="0" lvl="0" indent="0" algn="l" rtl="0">
+              <a:spcBef>
+                <a:spcPts val="0"/>
+              </a:spcBef>
+              <a:spcAft>
+                <a:spcPts val="0"/>
+              </a:spcAft>
+              <a:buNone/>
+            </a:pPr>
+            <a:r>
+              <a:rPr lang="en-US" sz="1100" b="1" i="0" u="none" strike="noStrike" cap="none" dirty="0">
+                <a:solidFill>
+                  <a:srgbClr val="000000"/>
+                </a:solidFill>
+                <a:effectLst/>
+                <a:latin typeface="Arial"/>
+                <a:ea typeface="Arial"/>
+                <a:cs typeface="Arial"/>
+                <a:sym typeface="Arial"/>
+              </a:rPr>
+              <a:t>Termination: </a:t>
+            </a:r>
+            <a:r>
+              <a:rPr lang="en-US" sz="1100" b="0" i="0" u="none" strike="noStrike" cap="none" dirty="0">
+                <a:solidFill>
+                  <a:srgbClr val="000000"/>
+                </a:solidFill>
+                <a:effectLst/>
+                <a:latin typeface="Arial"/>
+                <a:ea typeface="Arial"/>
+                <a:cs typeface="Arial"/>
+                <a:sym typeface="Arial"/>
+              </a:rPr>
+              <a:t>Just stop sending data</a:t>
+            </a:r>
+          </a:p>
+          <a:p>
+            <a:pPr marL="0" lvl="0" indent="0" algn="l" rtl="0">
+              <a:spcBef>
+                <a:spcPts val="0"/>
+              </a:spcBef>
+              <a:spcAft>
+                <a:spcPts val="0"/>
+              </a:spcAft>
+              <a:buNone/>
+            </a:pPr>
+            <a:r>
+              <a:rPr lang="en-US" sz="1100" b="1" i="0" u="none" strike="noStrike" cap="none" dirty="0">
+                <a:solidFill>
+                  <a:srgbClr val="000000"/>
+                </a:solidFill>
+                <a:effectLst/>
+                <a:latin typeface="Arial"/>
+                <a:ea typeface="Arial"/>
+                <a:cs typeface="Arial"/>
+                <a:sym typeface="Arial"/>
+              </a:rPr>
+              <a:t>Reliability: </a:t>
+            </a:r>
+            <a:r>
+              <a:rPr lang="en-US" sz="1100" b="0" i="0" u="none" strike="noStrike" cap="none" dirty="0">
+                <a:solidFill>
+                  <a:srgbClr val="000000"/>
+                </a:solidFill>
+                <a:effectLst/>
+                <a:latin typeface="Arial"/>
+                <a:ea typeface="Arial"/>
+                <a:cs typeface="Arial"/>
+                <a:sym typeface="Arial"/>
+              </a:rPr>
+              <a:t>Best effort (packets can be lost or reordered)</a:t>
+            </a:r>
+          </a:p>
+          <a:p>
             <a:pPr marL="0" lvl="0" indent="0" algn="l" rtl="0">
               <a:spcBef>
                 <a:spcPts val="0"/>
@@ -2064,6 +3213,400 @@
             <a:r>
               <a:rPr lang="en-US" dirty="0"/>
               <a:t>.</a:t>
+            </a:r>
+          </a:p>
+          <a:p>
+            <a:pPr marL="0" lvl="0" indent="0" algn="l" rtl="0">
+              <a:spcBef>
+                <a:spcPts val="0"/>
+              </a:spcBef>
+              <a:spcAft>
+                <a:spcPts val="0"/>
+              </a:spcAft>
+              <a:buNone/>
+            </a:pPr>
+            <a:endParaRPr lang="en-US" dirty="0"/>
+          </a:p>
+          <a:p>
+            <a:pPr marL="0" lvl="0" indent="0" algn="l" rtl="0">
+              <a:spcBef>
+                <a:spcPts val="0"/>
+              </a:spcBef>
+              <a:spcAft>
+                <a:spcPts val="0"/>
+              </a:spcAft>
+              <a:buNone/>
+            </a:pPr>
+            <a:endParaRPr lang="en-US" dirty="0"/>
+          </a:p>
+          <a:p>
+            <a:pPr marL="0" lvl="0" indent="0" algn="l" rtl="0">
+              <a:spcBef>
+                <a:spcPts val="0"/>
+              </a:spcBef>
+              <a:spcAft>
+                <a:spcPts val="0"/>
+              </a:spcAft>
+              <a:buNone/>
+            </a:pPr>
+            <a:r>
+              <a:rPr lang="en-US" dirty="0"/>
+              <a:t>---</a:t>
+            </a:r>
+          </a:p>
+          <a:p>
+            <a:pPr marL="0" lvl="0" indent="0" algn="l" rtl="0">
+              <a:spcBef>
+                <a:spcPts val="0"/>
+              </a:spcBef>
+              <a:spcAft>
+                <a:spcPts val="0"/>
+              </a:spcAft>
+              <a:buNone/>
+            </a:pPr>
+            <a:r>
+              <a:rPr lang="en-US" i="1" u="sng" dirty="0"/>
+              <a:t>For reference:</a:t>
+            </a:r>
+          </a:p>
+          <a:p>
+            <a:pPr marL="0" lvl="0" indent="0" algn="l" rtl="0">
+              <a:spcBef>
+                <a:spcPts val="0"/>
+              </a:spcBef>
+              <a:spcAft>
+                <a:spcPts val="0"/>
+              </a:spcAft>
+              <a:buNone/>
+            </a:pPr>
+            <a:r>
+              <a:rPr lang="en-US" b="1" dirty="0"/>
+              <a:t>The "Protocol" Buffer vs. The "Network“</a:t>
+            </a:r>
+          </a:p>
+          <a:p>
+            <a:pPr marL="0" lvl="0" indent="0" algn="l" rtl="0">
+              <a:spcBef>
+                <a:spcPts val="0"/>
+              </a:spcBef>
+              <a:spcAft>
+                <a:spcPts val="0"/>
+              </a:spcAft>
+              <a:buNone/>
+            </a:pPr>
+            <a:r>
+              <a:rPr lang="en-US" dirty="0"/>
+              <a:t>When you call </a:t>
+            </a:r>
+            <a:r>
+              <a:rPr lang="en-US" sz="1100" b="0" i="0" u="none" strike="noStrike" cap="none" dirty="0" err="1">
+                <a:solidFill>
+                  <a:srgbClr val="000000"/>
+                </a:solidFill>
+                <a:latin typeface="Arial"/>
+                <a:ea typeface="Arial"/>
+                <a:cs typeface="Arial"/>
+                <a:sym typeface="Arial"/>
+              </a:rPr>
+              <a:t>sendto</a:t>
+            </a:r>
+            <a:r>
+              <a:rPr lang="en-US" sz="1100" b="0" i="0" u="none" strike="noStrike" cap="none" dirty="0">
+                <a:solidFill>
+                  <a:srgbClr val="000000"/>
+                </a:solidFill>
+                <a:latin typeface="Arial"/>
+                <a:ea typeface="Arial"/>
+                <a:cs typeface="Arial"/>
+                <a:sym typeface="Arial"/>
+              </a:rPr>
+              <a:t>()</a:t>
+            </a:r>
+            <a:r>
+              <a:rPr lang="en-US" dirty="0"/>
+              <a:t>, the operating system takes the data from your application-level buffer and copies it into the </a:t>
+            </a:r>
+            <a:r>
+              <a:rPr lang="en-US" b="1" dirty="0"/>
+              <a:t>kernel's outgoing network buffer</a:t>
+            </a:r>
+            <a:r>
+              <a:rPr lang="en-US" dirty="0"/>
+              <a:t>.</a:t>
+            </a:r>
+          </a:p>
+          <a:p>
+            <a:pPr marL="171450" lvl="0" indent="-171450" algn="l" rtl="0">
+              <a:spcBef>
+                <a:spcPts val="0"/>
+              </a:spcBef>
+              <a:spcAft>
+                <a:spcPts val="0"/>
+              </a:spcAft>
+            </a:pPr>
+            <a:r>
+              <a:rPr lang="en-US" b="1" dirty="0"/>
+              <a:t>Completion:</a:t>
+            </a:r>
+            <a:r>
+              <a:rPr lang="en-US" dirty="0"/>
+              <a:t> </a:t>
+            </a:r>
+            <a:br>
+              <a:rPr lang="en-US" dirty="0"/>
+            </a:br>
+            <a:r>
+              <a:rPr lang="en-US" dirty="0"/>
+              <a:t>As soon as that copy is finished, </a:t>
+            </a:r>
+            <a:r>
+              <a:rPr lang="en-US" sz="1100" b="0" i="0" u="none" strike="noStrike" cap="none" dirty="0" err="1">
+                <a:solidFill>
+                  <a:srgbClr val="000000"/>
+                </a:solidFill>
+                <a:latin typeface="Arial"/>
+                <a:ea typeface="Arial"/>
+                <a:cs typeface="Arial"/>
+                <a:sym typeface="Arial"/>
+              </a:rPr>
+              <a:t>sendto</a:t>
+            </a:r>
+            <a:r>
+              <a:rPr lang="en-US" sz="1100" b="0" i="0" u="none" strike="noStrike" cap="none" dirty="0">
+                <a:solidFill>
+                  <a:srgbClr val="000000"/>
+                </a:solidFill>
+                <a:latin typeface="Arial"/>
+                <a:ea typeface="Arial"/>
+                <a:cs typeface="Arial"/>
+                <a:sym typeface="Arial"/>
+              </a:rPr>
+              <a:t>()</a:t>
+            </a:r>
+            <a:r>
+              <a:rPr lang="en-US" dirty="0"/>
+              <a:t> returns.</a:t>
+            </a:r>
+          </a:p>
+          <a:p>
+            <a:pPr marL="171450" lvl="0" indent="-171450" algn="l" rtl="0">
+              <a:spcBef>
+                <a:spcPts val="0"/>
+              </a:spcBef>
+              <a:spcAft>
+                <a:spcPts val="0"/>
+              </a:spcAft>
+            </a:pPr>
+            <a:r>
+              <a:rPr lang="en-US" b="1" dirty="0"/>
+              <a:t>The UDP Reality:</a:t>
+            </a:r>
+            <a:r>
+              <a:rPr lang="en-US" dirty="0"/>
+              <a:t> </a:t>
+            </a:r>
+            <a:br>
+              <a:rPr lang="en-US" dirty="0"/>
+            </a:br>
+            <a:r>
+              <a:rPr lang="en-US" dirty="0"/>
+              <a:t>It does </a:t>
+            </a:r>
+            <a:r>
+              <a:rPr lang="en-US" b="1" dirty="0"/>
+              <a:t>not</a:t>
+            </a:r>
+            <a:r>
+              <a:rPr lang="en-US" dirty="0"/>
+              <a:t> wait for the data to actually reach the destination, </a:t>
+            </a:r>
+            <a:br>
+              <a:rPr lang="en-US" dirty="0"/>
+            </a:br>
+            <a:r>
+              <a:rPr lang="en-US" dirty="0"/>
+              <a:t>nor does it wait for an acknowledgment (since UDP doesn't use them). </a:t>
+            </a:r>
+            <a:br>
+              <a:rPr lang="en-US" dirty="0"/>
+            </a:br>
+            <a:r>
+              <a:rPr lang="en-US" dirty="0"/>
+              <a:t>Because memory-to-memory copying is incredibly fast, </a:t>
+            </a:r>
+            <a:br>
+              <a:rPr lang="en-US" dirty="0"/>
+            </a:br>
+            <a:r>
+              <a:rPr lang="en-US" sz="1100" b="0" i="0" u="none" strike="noStrike" cap="none" dirty="0" err="1">
+                <a:solidFill>
+                  <a:srgbClr val="000000"/>
+                </a:solidFill>
+                <a:latin typeface="Arial"/>
+                <a:ea typeface="Arial"/>
+                <a:cs typeface="Arial"/>
+                <a:sym typeface="Arial"/>
+              </a:rPr>
+              <a:t>sendto</a:t>
+            </a:r>
+            <a:r>
+              <a:rPr lang="en-US" sz="1100" b="0" i="0" u="none" strike="noStrike" cap="none" dirty="0">
+                <a:solidFill>
+                  <a:srgbClr val="000000"/>
+                </a:solidFill>
+                <a:latin typeface="Arial"/>
+                <a:ea typeface="Arial"/>
+                <a:cs typeface="Arial"/>
+                <a:sym typeface="Arial"/>
+              </a:rPr>
+              <a:t>()</a:t>
+            </a:r>
+            <a:r>
+              <a:rPr lang="en-US" dirty="0"/>
+              <a:t> usually returns almost instantaneously.</a:t>
+            </a:r>
+          </a:p>
+          <a:p>
+            <a:pPr marL="0" lvl="0" indent="0" algn="l" rtl="0">
+              <a:spcBef>
+                <a:spcPts val="0"/>
+              </a:spcBef>
+              <a:spcAft>
+                <a:spcPts val="0"/>
+              </a:spcAft>
+              <a:buNone/>
+            </a:pPr>
+            <a:endParaRPr lang="en-US" b="1" dirty="0"/>
+          </a:p>
+          <a:p>
+            <a:pPr marL="0" lvl="0" indent="0" algn="l" rtl="0">
+              <a:spcBef>
+                <a:spcPts val="0"/>
+              </a:spcBef>
+              <a:spcAft>
+                <a:spcPts val="0"/>
+              </a:spcAft>
+              <a:buNone/>
+            </a:pPr>
+            <a:r>
+              <a:rPr lang="en-US" b="1" dirty="0"/>
+              <a:t>When does it actually block?</a:t>
+            </a:r>
+          </a:p>
+          <a:p>
+            <a:pPr marL="0" lvl="0" indent="0" algn="l" rtl="0">
+              <a:spcBef>
+                <a:spcPts val="0"/>
+              </a:spcBef>
+              <a:spcAft>
+                <a:spcPts val="0"/>
+              </a:spcAft>
+              <a:buNone/>
+            </a:pPr>
+            <a:r>
+              <a:rPr lang="en-US" sz="1100" b="0" i="0" u="none" strike="noStrike" cap="none" dirty="0" err="1">
+                <a:solidFill>
+                  <a:srgbClr val="000000"/>
+                </a:solidFill>
+                <a:latin typeface="Arial"/>
+                <a:ea typeface="Arial"/>
+                <a:cs typeface="Arial"/>
+                <a:sym typeface="Arial"/>
+              </a:rPr>
+              <a:t>sendto</a:t>
+            </a:r>
+            <a:r>
+              <a:rPr lang="en-US" sz="1100" b="0" i="0" u="none" strike="noStrike" cap="none" dirty="0">
+                <a:solidFill>
+                  <a:srgbClr val="000000"/>
+                </a:solidFill>
+                <a:latin typeface="Arial"/>
+                <a:ea typeface="Arial"/>
+                <a:cs typeface="Arial"/>
+                <a:sym typeface="Arial"/>
+              </a:rPr>
+              <a:t>()</a:t>
+            </a:r>
+            <a:r>
+              <a:rPr lang="en-US" dirty="0"/>
+              <a:t> will only block if the </a:t>
+            </a:r>
+            <a:r>
+              <a:rPr lang="en-US" b="1" dirty="0"/>
+              <a:t>kernel's send buffer is completely full</a:t>
+            </a:r>
+            <a:r>
+              <a:rPr lang="en-US" dirty="0"/>
+              <a:t>. </a:t>
+            </a:r>
+          </a:p>
+          <a:p>
+            <a:pPr marL="0" lvl="0" indent="0" algn="l" rtl="0">
+              <a:spcBef>
+                <a:spcPts val="0"/>
+              </a:spcBef>
+              <a:spcAft>
+                <a:spcPts val="0"/>
+              </a:spcAft>
+              <a:buNone/>
+            </a:pPr>
+            <a:endParaRPr lang="en-US" dirty="0"/>
+          </a:p>
+          <a:p>
+            <a:pPr marL="0" lvl="0" indent="0" algn="l" rtl="0">
+              <a:spcBef>
+                <a:spcPts val="0"/>
+              </a:spcBef>
+              <a:spcAft>
+                <a:spcPts val="0"/>
+              </a:spcAft>
+              <a:buNone/>
+            </a:pPr>
+            <a:r>
+              <a:rPr lang="en-US" dirty="0"/>
+              <a:t>This happens if:</a:t>
+            </a:r>
+          </a:p>
+          <a:p>
+            <a:pPr marL="171450" lvl="0" indent="-171450" algn="l" rtl="0">
+              <a:spcBef>
+                <a:spcPts val="0"/>
+              </a:spcBef>
+              <a:spcAft>
+                <a:spcPts val="0"/>
+              </a:spcAft>
+            </a:pPr>
+            <a:r>
+              <a:rPr lang="en-US" dirty="0"/>
+              <a:t>You are generating data significantly faster than your local network interface card (NIC) can push bits onto the wire.</a:t>
+            </a:r>
+          </a:p>
+          <a:p>
+            <a:pPr marL="171450" lvl="0" indent="-171450" algn="l" rtl="0">
+              <a:spcBef>
+                <a:spcPts val="0"/>
+              </a:spcBef>
+              <a:spcAft>
+                <a:spcPts val="0"/>
+              </a:spcAft>
+            </a:pPr>
+            <a:r>
+              <a:rPr lang="en-US" dirty="0"/>
+              <a:t>The local outgoing queue is congested.</a:t>
+            </a:r>
+          </a:p>
+          <a:p>
+            <a:pPr marL="171450" lvl="0" indent="-171450" algn="l" rtl="0">
+              <a:spcBef>
+                <a:spcPts val="0"/>
+              </a:spcBef>
+              <a:spcAft>
+                <a:spcPts val="0"/>
+              </a:spcAft>
+            </a:pPr>
+            <a:r>
+              <a:rPr lang="en-US" dirty="0"/>
+              <a:t>If the buffer is full, the thread will sleep until there is enough room to copy your new packet into the kernel.</a:t>
             </a:r>
           </a:p>
           <a:p>
@@ -2180,6 +3723,293 @@
               </a:spcAft>
               <a:buNone/>
             </a:pPr>
+            <a:r>
+              <a:rPr lang="en-US" b="1" dirty="0"/>
+              <a:t>TCP</a:t>
+            </a:r>
+            <a:r>
+              <a:rPr lang="en-US" dirty="0"/>
+              <a:t> is </a:t>
+            </a:r>
+            <a:r>
+              <a:rPr lang="en-US" b="1" dirty="0"/>
+              <a:t>byte-stream oriented</a:t>
+            </a:r>
+            <a:r>
+              <a:rPr lang="en-US" dirty="0"/>
+              <a:t>. This means it treats data as a </a:t>
+            </a:r>
+            <a:r>
+              <a:rPr lang="en-US" b="1" dirty="0"/>
+              <a:t>continuous</a:t>
+            </a:r>
+            <a:r>
+              <a:rPr lang="en-US" dirty="0"/>
+              <a:t>, </a:t>
+            </a:r>
+          </a:p>
+          <a:p>
+            <a:pPr marL="0" lvl="0" indent="0" algn="l" rtl="0">
+              <a:spcBef>
+                <a:spcPts val="0"/>
+              </a:spcBef>
+              <a:spcAft>
+                <a:spcPts val="0"/>
+              </a:spcAft>
+              <a:buNone/>
+            </a:pPr>
+            <a:r>
+              <a:rPr lang="en-US" dirty="0"/>
+              <a:t>flowing sequence of bytes with no inherent beginning or end markers provided by the protocol itself.</a:t>
+            </a:r>
+            <a:endParaRPr lang="en-US" sz="1100" b="1" i="0" u="none" strike="noStrike" cap="none" dirty="0">
+              <a:solidFill>
+                <a:srgbClr val="000000"/>
+              </a:solidFill>
+              <a:effectLst/>
+              <a:latin typeface="Arial"/>
+              <a:ea typeface="Arial"/>
+              <a:cs typeface="Arial"/>
+              <a:sym typeface="Arial"/>
+            </a:endParaRPr>
+          </a:p>
+          <a:p>
+            <a:pPr marL="0" lvl="0" indent="0" algn="l" rtl="0">
+              <a:spcBef>
+                <a:spcPts val="0"/>
+              </a:spcBef>
+              <a:spcAft>
+                <a:spcPts val="0"/>
+              </a:spcAft>
+              <a:buNone/>
+            </a:pPr>
+            <a:r>
+              <a:rPr lang="en-US" sz="1100" b="0" i="0" u="none" strike="noStrike" cap="none" dirty="0">
+                <a:solidFill>
+                  <a:srgbClr val="000000"/>
+                </a:solidFill>
+                <a:effectLst/>
+                <a:latin typeface="Arial"/>
+                <a:ea typeface="Arial"/>
+                <a:cs typeface="Arial"/>
+                <a:sym typeface="Arial"/>
+              </a:rPr>
+              <a:t>(i.e., uses “streams” instead of “datagrams”)</a:t>
+            </a:r>
+          </a:p>
+          <a:p>
+            <a:pPr marL="0" lvl="0" indent="0" algn="l" rtl="0">
+              <a:spcBef>
+                <a:spcPts val="0"/>
+              </a:spcBef>
+              <a:spcAft>
+                <a:spcPts val="0"/>
+              </a:spcAft>
+              <a:buNone/>
+            </a:pPr>
+            <a:endParaRPr lang="en-US" sz="1100" b="1" i="0" u="none" strike="noStrike" cap="none" dirty="0">
+              <a:solidFill>
+                <a:srgbClr val="000000"/>
+              </a:solidFill>
+              <a:effectLst/>
+              <a:latin typeface="Arial"/>
+              <a:ea typeface="Arial"/>
+              <a:cs typeface="Arial"/>
+              <a:sym typeface="Arial"/>
+            </a:endParaRPr>
+          </a:p>
+          <a:p>
+            <a:pPr marL="0" lvl="0" indent="0" algn="l" rtl="0">
+              <a:spcBef>
+                <a:spcPts val="0"/>
+              </a:spcBef>
+              <a:spcAft>
+                <a:spcPts val="0"/>
+              </a:spcAft>
+              <a:buNone/>
+            </a:pPr>
+            <a:r>
+              <a:rPr lang="en-US" sz="1100" b="1" i="0" u="none" strike="noStrike" cap="none" dirty="0">
+                <a:solidFill>
+                  <a:srgbClr val="000000"/>
+                </a:solidFill>
+                <a:effectLst/>
+                <a:latin typeface="Arial"/>
+                <a:ea typeface="Arial"/>
+                <a:cs typeface="Arial"/>
+                <a:sym typeface="Arial"/>
+              </a:rPr>
+              <a:t>TCP Connection</a:t>
+            </a:r>
+          </a:p>
+          <a:p>
+            <a:pPr marL="0" lvl="0" indent="0" algn="l" rtl="0">
+              <a:spcBef>
+                <a:spcPts val="0"/>
+              </a:spcBef>
+              <a:spcAft>
+                <a:spcPts val="0"/>
+              </a:spcAft>
+              <a:buNone/>
+            </a:pPr>
+            <a:r>
+              <a:rPr lang="en-US" sz="1100" b="1" i="0" u="none" strike="noStrike" cap="none" dirty="0">
+                <a:solidFill>
+                  <a:srgbClr val="000000"/>
+                </a:solidFill>
+                <a:effectLst/>
+                <a:latin typeface="Arial"/>
+                <a:ea typeface="Arial"/>
+                <a:cs typeface="Arial"/>
+                <a:sym typeface="Arial"/>
+              </a:rPr>
+              <a:t>Handshake: </a:t>
+            </a:r>
+            <a:r>
+              <a:rPr lang="en-US" sz="1100" b="0" i="0" u="none" strike="noStrike" cap="none" dirty="0">
+                <a:solidFill>
+                  <a:srgbClr val="000000"/>
+                </a:solidFill>
+                <a:effectLst/>
+                <a:latin typeface="Arial"/>
+                <a:ea typeface="Arial"/>
+                <a:cs typeface="Arial"/>
+                <a:sym typeface="Arial"/>
+              </a:rPr>
+              <a:t>3-way (SYN, SYN-ACK, ACK)</a:t>
+            </a:r>
+            <a:endParaRPr lang="en-US" sz="1100" b="1" i="0" u="none" strike="noStrike" cap="none" dirty="0">
+              <a:solidFill>
+                <a:srgbClr val="000000"/>
+              </a:solidFill>
+              <a:effectLst/>
+              <a:latin typeface="Arial"/>
+              <a:ea typeface="Arial"/>
+              <a:cs typeface="Arial"/>
+              <a:sym typeface="Arial"/>
+            </a:endParaRPr>
+          </a:p>
+          <a:p>
+            <a:pPr marL="0" lvl="0" indent="0" algn="l" rtl="0">
+              <a:spcBef>
+                <a:spcPts val="0"/>
+              </a:spcBef>
+              <a:spcAft>
+                <a:spcPts val="0"/>
+              </a:spcAft>
+              <a:buNone/>
+            </a:pPr>
+            <a:r>
+              <a:rPr lang="en-US" sz="1100" b="1" i="0" u="none" strike="noStrike" cap="none" dirty="0">
+                <a:solidFill>
+                  <a:srgbClr val="000000"/>
+                </a:solidFill>
+                <a:effectLst/>
+                <a:latin typeface="Arial"/>
+                <a:ea typeface="Arial"/>
+                <a:cs typeface="Arial"/>
+                <a:sym typeface="Arial"/>
+              </a:rPr>
+              <a:t>Kernel State: </a:t>
+            </a:r>
+            <a:r>
+              <a:rPr lang="en-US" sz="1100" b="0" i="0" u="none" strike="noStrike" cap="none" dirty="0">
+                <a:solidFill>
+                  <a:srgbClr val="000000"/>
+                </a:solidFill>
+                <a:effectLst/>
+                <a:latin typeface="Arial"/>
+                <a:ea typeface="Arial"/>
+                <a:cs typeface="Arial"/>
+                <a:sym typeface="Arial"/>
+              </a:rPr>
+              <a:t>Maintains sequence numbers/windows</a:t>
+            </a:r>
+          </a:p>
+          <a:p>
+            <a:pPr marL="0" lvl="0" indent="0" algn="l" rtl="0">
+              <a:spcBef>
+                <a:spcPts val="0"/>
+              </a:spcBef>
+              <a:spcAft>
+                <a:spcPts val="0"/>
+              </a:spcAft>
+              <a:buNone/>
+            </a:pPr>
+            <a:r>
+              <a:rPr lang="en-US" sz="1100" b="1" i="0" u="none" strike="noStrike" cap="none" dirty="0">
+                <a:solidFill>
+                  <a:srgbClr val="000000"/>
+                </a:solidFill>
+                <a:effectLst/>
+                <a:latin typeface="Arial"/>
+                <a:ea typeface="Arial"/>
+                <a:cs typeface="Arial"/>
+                <a:sym typeface="Arial"/>
+              </a:rPr>
+              <a:t>Termination: </a:t>
+            </a:r>
+            <a:r>
+              <a:rPr lang="en-US" sz="1100" b="0" i="0" u="none" strike="noStrike" cap="none" dirty="0">
+                <a:solidFill>
+                  <a:srgbClr val="000000"/>
+                </a:solidFill>
+                <a:effectLst/>
+                <a:latin typeface="Arial"/>
+                <a:ea typeface="Arial"/>
+                <a:cs typeface="Arial"/>
+                <a:sym typeface="Arial"/>
+              </a:rPr>
+              <a:t>4-way (FIN/ACK)</a:t>
+            </a:r>
+          </a:p>
+          <a:p>
+            <a:pPr marL="0" lvl="0" indent="0" algn="l" rtl="0">
+              <a:spcBef>
+                <a:spcPts val="0"/>
+              </a:spcBef>
+              <a:spcAft>
+                <a:spcPts val="0"/>
+              </a:spcAft>
+              <a:buNone/>
+            </a:pPr>
+            <a:r>
+              <a:rPr lang="en-US" sz="1100" b="1" i="0" u="none" strike="noStrike" cap="none" dirty="0">
+                <a:solidFill>
+                  <a:srgbClr val="000000"/>
+                </a:solidFill>
+                <a:effectLst/>
+                <a:latin typeface="Arial"/>
+                <a:ea typeface="Arial"/>
+                <a:cs typeface="Arial"/>
+                <a:sym typeface="Arial"/>
+              </a:rPr>
+              <a:t>Reliability: </a:t>
+            </a:r>
+            <a:r>
+              <a:rPr lang="en-US" sz="1100" b="0" i="0" u="none" strike="noStrike" cap="none" dirty="0">
+                <a:solidFill>
+                  <a:srgbClr val="000000"/>
+                </a:solidFill>
+                <a:effectLst/>
+                <a:latin typeface="Arial"/>
+                <a:ea typeface="Arial"/>
+                <a:cs typeface="Arial"/>
+                <a:sym typeface="Arial"/>
+              </a:rPr>
+              <a:t>Guaranteed delivery/ordering</a:t>
+            </a:r>
+          </a:p>
+          <a:p>
+            <a:pPr marL="0" lvl="0" indent="0" algn="l" rtl="0">
+              <a:spcBef>
+                <a:spcPts val="0"/>
+              </a:spcBef>
+              <a:spcAft>
+                <a:spcPts val="0"/>
+              </a:spcAft>
+              <a:buNone/>
+            </a:pPr>
             <a:endParaRPr lang="en-US" dirty="0"/>
           </a:p>
           <a:p>
@@ -2591,6 +4421,279 @@
             </a:r>
             <a:r>
               <a:rPr lang="en-US" dirty="0"/>
+              <a:t>.</a:t>
+            </a:r>
+          </a:p>
+          <a:p>
+            <a:pPr marL="0" lvl="0" indent="0" algn="l" rtl="0">
+              <a:spcBef>
+                <a:spcPts val="0"/>
+              </a:spcBef>
+              <a:spcAft>
+                <a:spcPts val="0"/>
+              </a:spcAft>
+              <a:buNone/>
+            </a:pPr>
+            <a:endParaRPr lang="en-US" dirty="0"/>
+          </a:p>
+          <a:p>
+            <a:pPr marL="0" lvl="0" indent="0" algn="l" rtl="0">
+              <a:spcBef>
+                <a:spcPts val="0"/>
+              </a:spcBef>
+              <a:spcAft>
+                <a:spcPts val="0"/>
+              </a:spcAft>
+              <a:buNone/>
+            </a:pPr>
+            <a:r>
+              <a:rPr lang="en-US" dirty="0"/>
+              <a:t>---</a:t>
+            </a:r>
+          </a:p>
+          <a:p>
+            <a:pPr marL="0" lvl="0" indent="0" algn="l" rtl="0">
+              <a:spcBef>
+                <a:spcPts val="0"/>
+              </a:spcBef>
+              <a:spcAft>
+                <a:spcPts val="0"/>
+              </a:spcAft>
+              <a:buNone/>
+            </a:pPr>
+            <a:r>
+              <a:rPr lang="en-US" i="1" u="sng" dirty="0"/>
+              <a:t>For reference:</a:t>
+            </a:r>
+          </a:p>
+          <a:p>
+            <a:pPr marL="0" marR="0" lvl="0" indent="0" algn="l" defTabSz="914400" rtl="0" eaLnBrk="1" fontAlgn="auto" latinLnBrk="0" hangingPunct="1">
+              <a:lnSpc>
+                <a:spcPct val="100000"/>
+              </a:lnSpc>
+              <a:spcBef>
+                <a:spcPts val="0"/>
+              </a:spcBef>
+              <a:spcAft>
+                <a:spcPts val="0"/>
+              </a:spcAft>
+              <a:buClr>
+                <a:srgbClr val="000000"/>
+              </a:buClr>
+              <a:buSzPts val="1100"/>
+              <a:buFont typeface="Arial"/>
+              <a:buNone/>
+              <a:tabLst/>
+              <a:defRPr/>
+            </a:pPr>
+            <a:r>
+              <a:rPr lang="en-US" sz="1100" dirty="0">
+                <a:solidFill>
+                  <a:schemeClr val="dk2"/>
+                </a:solidFill>
+              </a:rPr>
+              <a:t>The steps involved in establishing a TCP socket on the server side are as follows:</a:t>
+            </a:r>
+            <a:endParaRPr lang="en-US" i="1" u="sng" dirty="0"/>
+          </a:p>
+          <a:p>
+            <a:pPr marL="171450" lvl="0" indent="-171450" algn="l" rtl="0">
+              <a:spcBef>
+                <a:spcPts val="0"/>
+              </a:spcBef>
+              <a:spcAft>
+                <a:spcPts val="0"/>
+              </a:spcAft>
+            </a:pPr>
+            <a:r>
+              <a:rPr lang="en-US" sz="1100" dirty="0">
+                <a:solidFill>
+                  <a:schemeClr val="dk2"/>
+                </a:solidFill>
+              </a:rPr>
+              <a:t>Create a socket with the </a:t>
+            </a:r>
+            <a:r>
+              <a:rPr lang="en-US" sz="1100" b="1" dirty="0">
+                <a:solidFill>
+                  <a:schemeClr val="dk2"/>
+                </a:solidFill>
+              </a:rPr>
+              <a:t>socket() </a:t>
+            </a:r>
+            <a:r>
+              <a:rPr lang="en-US" sz="1100" dirty="0">
+                <a:solidFill>
+                  <a:schemeClr val="dk2"/>
+                </a:solidFill>
+              </a:rPr>
+              <a:t>function;</a:t>
+            </a:r>
+          </a:p>
+          <a:p>
+            <a:pPr marL="171450" lvl="0" indent="-171450" algn="l" rtl="0">
+              <a:spcBef>
+                <a:spcPts val="0"/>
+              </a:spcBef>
+              <a:spcAft>
+                <a:spcPts val="0"/>
+              </a:spcAft>
+            </a:pPr>
+            <a:r>
+              <a:rPr lang="en-US" sz="1100" dirty="0">
+                <a:solidFill>
+                  <a:schemeClr val="dk2"/>
+                </a:solidFill>
+              </a:rPr>
+              <a:t>Bind the socket to an address using the </a:t>
+            </a:r>
+            <a:r>
+              <a:rPr lang="en-US" sz="1100" b="1" dirty="0">
+                <a:solidFill>
+                  <a:schemeClr val="dk2"/>
+                </a:solidFill>
+              </a:rPr>
+              <a:t>bind() </a:t>
+            </a:r>
+            <a:r>
+              <a:rPr lang="en-US" sz="1100" dirty="0">
+                <a:solidFill>
+                  <a:schemeClr val="dk2"/>
+                </a:solidFill>
+              </a:rPr>
+              <a:t>function;</a:t>
+            </a:r>
+          </a:p>
+          <a:p>
+            <a:pPr marL="171450" lvl="0" indent="-171450" algn="l" rtl="0">
+              <a:spcBef>
+                <a:spcPts val="0"/>
+              </a:spcBef>
+              <a:spcAft>
+                <a:spcPts val="0"/>
+              </a:spcAft>
+            </a:pPr>
+            <a:r>
+              <a:rPr lang="en-US" sz="1100" dirty="0">
+                <a:solidFill>
+                  <a:schemeClr val="dk2"/>
+                </a:solidFill>
+              </a:rPr>
+              <a:t>Listen for connections with the </a:t>
+            </a:r>
+            <a:r>
+              <a:rPr lang="en-US" sz="1100" b="1" dirty="0">
+                <a:solidFill>
+                  <a:schemeClr val="dk2"/>
+                </a:solidFill>
+              </a:rPr>
+              <a:t>listen()</a:t>
+            </a:r>
+            <a:r>
+              <a:rPr lang="en-US" sz="1100" dirty="0">
+                <a:solidFill>
+                  <a:schemeClr val="dk2"/>
+                </a:solidFill>
+              </a:rPr>
+              <a:t> function;</a:t>
+            </a:r>
+          </a:p>
+          <a:p>
+            <a:pPr marL="171450" lvl="0" indent="-171450" algn="l" rtl="0">
+              <a:spcBef>
+                <a:spcPts val="0"/>
+              </a:spcBef>
+              <a:spcAft>
+                <a:spcPts val="0"/>
+              </a:spcAft>
+            </a:pPr>
+            <a:r>
+              <a:rPr lang="en-US" sz="1100" dirty="0">
+                <a:solidFill>
+                  <a:schemeClr val="dk2"/>
+                </a:solidFill>
+              </a:rPr>
+              <a:t>Accept a connection with the </a:t>
+            </a:r>
+            <a:r>
+              <a:rPr lang="en-US" sz="1100" b="1" dirty="0">
+                <a:solidFill>
+                  <a:schemeClr val="dk2"/>
+                </a:solidFill>
+              </a:rPr>
+              <a:t>accept() </a:t>
+            </a:r>
+            <a:r>
+              <a:rPr lang="en-US" sz="1100" dirty="0">
+                <a:solidFill>
+                  <a:schemeClr val="dk2"/>
+                </a:solidFill>
+              </a:rPr>
+              <a:t>function system call. </a:t>
+            </a:r>
+            <a:br>
+              <a:rPr lang="en-US" sz="1100" dirty="0">
+                <a:solidFill>
+                  <a:schemeClr val="dk2"/>
+                </a:solidFill>
+              </a:rPr>
+            </a:br>
+            <a:r>
+              <a:rPr lang="en-US" sz="1100" dirty="0">
+                <a:solidFill>
+                  <a:schemeClr val="dk2"/>
+                </a:solidFill>
+              </a:rPr>
+              <a:t>This call typically blocks until a client connects with the server.</a:t>
+            </a:r>
+          </a:p>
+          <a:p>
+            <a:pPr marL="171450" lvl="0" indent="-171450" algn="l" rtl="0">
+              <a:spcBef>
+                <a:spcPts val="0"/>
+              </a:spcBef>
+              <a:spcAft>
+                <a:spcPts val="0"/>
+              </a:spcAft>
+            </a:pPr>
+            <a:r>
+              <a:rPr lang="en-US" sz="1100" dirty="0">
+                <a:solidFill>
+                  <a:schemeClr val="dk2"/>
+                </a:solidFill>
+              </a:rPr>
+              <a:t>Send and receive data by means of </a:t>
+            </a:r>
+            <a:r>
+              <a:rPr lang="en-US" sz="1100" b="1" dirty="0">
+                <a:solidFill>
+                  <a:schemeClr val="dk2"/>
+                </a:solidFill>
+              </a:rPr>
+              <a:t>send() </a:t>
+            </a:r>
+            <a:r>
+              <a:rPr lang="en-US" sz="1100" dirty="0">
+                <a:solidFill>
+                  <a:schemeClr val="dk2"/>
+                </a:solidFill>
+              </a:rPr>
+              <a:t>and </a:t>
+            </a:r>
+            <a:r>
+              <a:rPr lang="en-US" sz="1100" b="1" dirty="0">
+                <a:solidFill>
+                  <a:schemeClr val="dk2"/>
+                </a:solidFill>
+              </a:rPr>
+              <a:t>receive()</a:t>
+            </a:r>
+            <a:r>
+              <a:rPr lang="en-US" sz="1100" dirty="0">
+                <a:solidFill>
+                  <a:schemeClr val="dk2"/>
+                </a:solidFill>
+              </a:rPr>
               <a:t>.</a:t>
             </a:r>
           </a:p>
@@ -2760,8 +4863,83 @@
                 <a:cs typeface="Arial"/>
                 <a:sym typeface="Arial"/>
               </a:rPr>
-              <a:t>Uses acknowledgments; if a client does not receive one, it retransmits the data.</a:t>
-            </a:r>
+              <a:t>Uses acknowledgments; </a:t>
+            </a:r>
+            <a:br>
+              <a:rPr lang="en-US" sz="1100" b="0" i="0" u="none" strike="noStrike" cap="none" dirty="0">
+                <a:solidFill>
+                  <a:srgbClr val="000000"/>
+                </a:solidFill>
+                <a:effectLst/>
+                <a:latin typeface="Arial"/>
+                <a:ea typeface="Arial"/>
+                <a:cs typeface="Arial"/>
+                <a:sym typeface="Arial"/>
+              </a:rPr>
+            </a:br>
+            <a:r>
+              <a:rPr lang="en-US" sz="1100" b="0" i="0" u="none" strike="noStrike" cap="none" dirty="0">
+                <a:solidFill>
+                  <a:srgbClr val="000000"/>
+                </a:solidFill>
+                <a:effectLst/>
+                <a:latin typeface="Arial"/>
+                <a:ea typeface="Arial"/>
+                <a:cs typeface="Arial"/>
+                <a:sym typeface="Arial"/>
+              </a:rPr>
+              <a:t>if a client does not receive one, it retransmits the data,</a:t>
+            </a:r>
+            <a:br>
+              <a:rPr lang="en-US" sz="1100" b="0" i="0" u="none" strike="noStrike" cap="none" dirty="0">
+                <a:solidFill>
+                  <a:srgbClr val="000000"/>
+                </a:solidFill>
+                <a:effectLst/>
+                <a:latin typeface="Arial"/>
+                <a:ea typeface="Arial"/>
+                <a:cs typeface="Arial"/>
+                <a:sym typeface="Arial"/>
+              </a:rPr>
+            </a:br>
+            <a:r>
+              <a:rPr lang="en-US" sz="1100" dirty="0">
+                <a:solidFill>
+                  <a:schemeClr val="dk1"/>
+                </a:solidFill>
+              </a:rPr>
+              <a:t>and waits for a longer period of time </a:t>
+            </a:r>
+            <a:r>
+              <a:rPr lang="en-US" sz="1100" b="1" dirty="0">
+                <a:solidFill>
+                  <a:schemeClr val="dk1"/>
+                </a:solidFill>
+              </a:rPr>
+              <a:t>(</a:t>
+            </a:r>
+            <a:r>
+              <a:rPr lang="en-US" b="1" dirty="0"/>
+              <a:t>Exponential Backoff)</a:t>
+            </a:r>
+            <a:r>
+              <a:rPr lang="en-US" sz="1100" dirty="0">
+                <a:solidFill>
+                  <a:schemeClr val="dk1"/>
+                </a:solidFill>
+              </a:rPr>
+              <a:t>.</a:t>
+            </a:r>
+            <a:endParaRPr lang="en-US" sz="1100" b="0" i="0" u="none" strike="noStrike" cap="none" dirty="0">
+              <a:solidFill>
+                <a:srgbClr val="000000"/>
+              </a:solidFill>
+              <a:effectLst/>
+              <a:latin typeface="Arial"/>
+              <a:ea typeface="Arial"/>
+              <a:cs typeface="Arial"/>
+              <a:sym typeface="Arial"/>
+            </a:endParaRPr>
           </a:p>
           <a:p>
             <a:pPr marL="171450" lvl="0" indent="-171450" algn="l" rtl="0">
@@ -4051,6 +6229,227 @@
               </a:spcAft>
               <a:buNone/>
             </a:pPr>
+            <a:endParaRPr lang="en-US" dirty="0"/>
+          </a:p>
+          <a:p>
+            <a:pPr marL="0" lvl="0" indent="0" algn="l" rtl="0">
+              <a:spcBef>
+                <a:spcPts val="0"/>
+              </a:spcBef>
+              <a:spcAft>
+                <a:spcPts val="0"/>
+              </a:spcAft>
+              <a:buNone/>
+            </a:pPr>
+            <a:endParaRPr lang="en-US" dirty="0"/>
+          </a:p>
+          <a:p>
+            <a:pPr marL="0" lvl="0" indent="0" algn="l" rtl="0">
+              <a:spcBef>
+                <a:spcPts val="0"/>
+              </a:spcBef>
+              <a:spcAft>
+                <a:spcPts val="0"/>
+              </a:spcAft>
+              <a:buNone/>
+            </a:pPr>
+            <a:r>
+              <a:rPr lang="en-US" dirty="0"/>
+              <a:t>---</a:t>
+            </a:r>
+          </a:p>
+          <a:p>
+            <a:pPr marL="0" lvl="0" indent="0" algn="l" rtl="0">
+              <a:spcBef>
+                <a:spcPts val="0"/>
+              </a:spcBef>
+              <a:spcAft>
+                <a:spcPts val="0"/>
+              </a:spcAft>
+              <a:buNone/>
+            </a:pPr>
+            <a:r>
+              <a:rPr lang="en-US" i="1" u="sng" dirty="0"/>
+              <a:t>For reference:</a:t>
+            </a:r>
+          </a:p>
+          <a:p>
+            <a:pPr marL="0" lvl="0" indent="0" algn="l" rtl="0">
+              <a:spcBef>
+                <a:spcPts val="0"/>
+              </a:spcBef>
+              <a:spcAft>
+                <a:spcPts val="0"/>
+              </a:spcAft>
+              <a:buNone/>
+            </a:pPr>
+            <a:r>
+              <a:rPr lang="en-US" sz="1100" b="1" i="0" u="none" strike="noStrike" cap="none" dirty="0">
+                <a:solidFill>
+                  <a:srgbClr val="000000"/>
+                </a:solidFill>
+                <a:effectLst/>
+                <a:latin typeface="Arial"/>
+                <a:ea typeface="Arial"/>
+                <a:cs typeface="Arial"/>
+                <a:sym typeface="Arial"/>
+              </a:rPr>
+              <a:t>AF_INET </a:t>
+            </a:r>
+            <a:r>
+              <a:rPr lang="en-US" sz="1100" b="0" i="0" u="none" strike="noStrike" cap="none" dirty="0">
+                <a:solidFill>
+                  <a:srgbClr val="000000"/>
+                </a:solidFill>
+                <a:effectLst/>
+                <a:latin typeface="Arial"/>
+                <a:ea typeface="Arial"/>
+                <a:cs typeface="Arial"/>
+                <a:sym typeface="Arial"/>
+              </a:rPr>
+              <a:t>is </a:t>
+            </a:r>
+            <a:r>
+              <a:rPr lang="en-US" dirty="0"/>
+              <a:t>a constant representing the address family for </a:t>
+            </a:r>
+            <a:r>
+              <a:rPr lang="en-US" b="1" dirty="0">
+                <a:effectLst/>
+              </a:rPr>
+              <a:t>IPv4 Internet protocols</a:t>
+            </a:r>
+            <a:r>
+              <a:rPr lang="en-US" dirty="0"/>
+              <a:t> in network socket programming</a:t>
+            </a:r>
+            <a:r>
+              <a:rPr lang="en-US" sz="1100" b="0" i="0" u="none" strike="noStrike" cap="none" dirty="0">
+                <a:solidFill>
+                  <a:srgbClr val="000000"/>
+                </a:solidFill>
+                <a:effectLst/>
+                <a:latin typeface="Arial"/>
+                <a:ea typeface="Arial"/>
+                <a:cs typeface="Arial"/>
+                <a:sym typeface="Arial"/>
+              </a:rPr>
+              <a:t>. </a:t>
+            </a:r>
+          </a:p>
+          <a:p>
+            <a:pPr marL="0" lvl="0" indent="0" algn="l" rtl="0">
+              <a:spcBef>
+                <a:spcPts val="0"/>
+              </a:spcBef>
+              <a:spcAft>
+                <a:spcPts val="0"/>
+              </a:spcAft>
+              <a:buNone/>
+            </a:pPr>
+            <a:r>
+              <a:rPr lang="en-US" sz="1100" b="0" i="0" u="none" strike="noStrike" cap="none" dirty="0">
+                <a:solidFill>
+                  <a:srgbClr val="000000"/>
+                </a:solidFill>
+                <a:effectLst/>
+                <a:latin typeface="Arial"/>
+                <a:ea typeface="Arial"/>
+                <a:cs typeface="Arial"/>
+                <a:sym typeface="Arial"/>
+              </a:rPr>
+              <a:t>It is used in the socket creation process to specify that communication will occur over IP addresses and ports, </a:t>
+            </a:r>
+          </a:p>
+          <a:p>
+            <a:pPr marL="0" lvl="0" indent="0" algn="l" rtl="0">
+              <a:spcBef>
+                <a:spcPts val="0"/>
+              </a:spcBef>
+              <a:spcAft>
+                <a:spcPts val="0"/>
+              </a:spcAft>
+              <a:buNone/>
+            </a:pPr>
+            <a:r>
+              <a:rPr lang="en-US" sz="1100" b="0" i="0" u="none" strike="noStrike" cap="none" dirty="0">
+                <a:solidFill>
+                  <a:srgbClr val="000000"/>
+                </a:solidFill>
+                <a:effectLst/>
+                <a:latin typeface="Arial"/>
+                <a:ea typeface="Arial"/>
+                <a:cs typeface="Arial"/>
+                <a:sym typeface="Arial"/>
+              </a:rPr>
+              <a:t>typically paired with SOCK_STREAM (TCP) or SOCK_DGRAM (UDP). </a:t>
+            </a:r>
+          </a:p>
+          <a:p>
+            <a:pPr marL="0" lvl="0" indent="0" algn="l" rtl="0">
+              <a:spcBef>
+                <a:spcPts val="0"/>
+              </a:spcBef>
+              <a:spcAft>
+                <a:spcPts val="0"/>
+              </a:spcAft>
+              <a:buNone/>
+            </a:pPr>
+            <a:r>
+              <a:rPr lang="en-US" sz="1100" b="0" i="0" u="none" strike="noStrike" cap="none" dirty="0">
+                <a:solidFill>
+                  <a:srgbClr val="000000"/>
+                </a:solidFill>
+                <a:effectLst/>
+                <a:latin typeface="Arial"/>
+                <a:ea typeface="Arial"/>
+                <a:cs typeface="Arial"/>
+                <a:sym typeface="Arial"/>
+              </a:rPr>
+              <a:t>It operates on 32-bit IPv4 addresses.</a:t>
+            </a:r>
+          </a:p>
+          <a:p>
+            <a:pPr marL="0" lvl="0" indent="0" algn="l" rtl="0">
+              <a:spcBef>
+                <a:spcPts val="0"/>
+              </a:spcBef>
+              <a:spcAft>
+                <a:spcPts val="0"/>
+              </a:spcAft>
+              <a:buNone/>
+            </a:pPr>
+            <a:endParaRPr lang="en-US" dirty="0"/>
+          </a:p>
+          <a:p>
+            <a:pPr marL="0" lvl="0" indent="0" algn="l" rtl="0">
+              <a:spcBef>
+                <a:spcPts val="0"/>
+              </a:spcBef>
+              <a:spcAft>
+                <a:spcPts val="0"/>
+              </a:spcAft>
+              <a:buNone/>
+            </a:pPr>
+            <a:r>
+              <a:rPr lang="en-US" b="1" dirty="0"/>
+              <a:t>sin: </a:t>
+            </a:r>
+            <a:r>
+              <a:rPr lang="en-US" dirty="0"/>
+              <a:t>socket internet</a:t>
+            </a:r>
+          </a:p>
+          <a:p>
+            <a:pPr marL="0" lvl="0" indent="0" algn="l" rtl="0">
+              <a:spcBef>
+                <a:spcPts val="0"/>
+              </a:spcBef>
+              <a:spcAft>
+                <a:spcPts val="0"/>
+              </a:spcAft>
+              <a:buNone/>
+            </a:pPr>
             <a:endParaRPr dirty="0"/>
           </a:p>
         </p:txBody>
@@ -4880,21 +7279,6 @@
             <a:r>
               <a:rPr lang="en-US" dirty="0"/>
               <a:t>Diagram identifying the Most Significant Bit (MSB) and Least Significant Bit (LSB) in a byte.</a:t>
-            </a:r>
-          </a:p>
-          <a:p>
-            <a:pPr marL="0" lvl="0" indent="0" algn="l" rtl="0">
-              <a:spcBef>
-                <a:spcPts val="0"/>
-              </a:spcBef>
-              <a:spcAft>
-                <a:spcPts val="0"/>
-              </a:spcAft>
-              <a:buNone/>
-            </a:pPr>
-            <a:r>
-              <a:rPr lang="en-US" dirty="0"/>
-              <a:t>Bit Significance in TCP</a:t>
             </a:r>
           </a:p>
           <a:p>
@@ -5212,25 +7596,6 @@
               </a:spcAft>
               <a:buNone/>
             </a:pPr>
-            <a:r>
-              <a:rPr lang="en-US" b="1" dirty="0"/>
-              <a:t>Goal</a:t>
-            </a:r>
-            <a:r>
-              <a:rPr lang="en-US" dirty="0"/>
-              <a:t>: The primary objective is to learn how to build client/server applications that communicate via sockets.</a:t>
-            </a:r>
-          </a:p>
-          <a:p>
-            <a:pPr marL="0" lvl="0" indent="0" algn="l" rtl="0">
-              <a:spcBef>
-                <a:spcPts val="0"/>
-              </a:spcBef>
-              <a:spcAft>
-                <a:spcPts val="0"/>
-              </a:spcAft>
-              <a:buNone/>
-            </a:pPr>
             <a:endParaRPr lang="en-US" dirty="0"/>
           </a:p>
         </p:txBody>
@@ -8694,6 +11059,47 @@
             <a:endParaRPr lang="en-US" b="1" dirty="0"/>
           </a:p>
           <a:p>
+            <a:pPr marL="0" marR="0" lvl="0" indent="0" algn="l" defTabSz="914400" rtl="0" eaLnBrk="1" fontAlgn="auto" latinLnBrk="0" hangingPunct="1">
+              <a:lnSpc>
+                <a:spcPct val="100000"/>
+              </a:lnSpc>
+              <a:spcBef>
+                <a:spcPts val="0"/>
+              </a:spcBef>
+              <a:spcAft>
+                <a:spcPts val="0"/>
+              </a:spcAft>
+              <a:buClr>
+                <a:srgbClr val="000000"/>
+              </a:buClr>
+              <a:buSzPts val="1100"/>
+              <a:buFont typeface="Arial"/>
+              <a:buNone/>
+              <a:tabLst/>
+              <a:defRPr/>
+            </a:pPr>
+            <a:r>
+              <a:rPr lang="en-US" b="1" dirty="0"/>
+              <a:t>Goal</a:t>
+            </a:r>
+            <a:r>
+              <a:rPr lang="en-US" dirty="0"/>
+              <a:t>: The primary objective is to learn how to build client/server applications that communicate via sockets.</a:t>
+            </a:r>
+          </a:p>
+          <a:p>
+            <a:pPr marL="0" lvl="0" indent="0" algn="l" rtl="0">
+              <a:spcBef>
+                <a:spcPts val="0"/>
+              </a:spcBef>
+              <a:spcAft>
+                <a:spcPts val="0"/>
+              </a:spcAft>
+              <a:buNone/>
+            </a:pPr>
+            <a:endParaRPr lang="en-US" b="1" dirty="0"/>
+          </a:p>
+          <a:p>
             <a:pPr marL="0" lvl="0" indent="0" algn="l" rtl="0">
               <a:spcBef>
                 <a:spcPts val="0"/>
@@ -8713,14 +11119,13 @@
             </a:r>
           </a:p>
           <a:p>
-            <a:pPr marL="0" lvl="0" indent="0" algn="l" rtl="0">
-              <a:spcBef>
-                <a:spcPts val="0"/>
-              </a:spcBef>
-              <a:spcAft>
-                <a:spcPts val="0"/>
-              </a:spcAft>
-              <a:buNone/>
+            <a:pPr marL="171450" lvl="0" indent="-171450" algn="l" rtl="0">
+              <a:spcBef>
+                <a:spcPts val="0"/>
+              </a:spcBef>
+              <a:spcAft>
+                <a:spcPts val="0"/>
+              </a:spcAft>
             </a:pPr>
             <a:r>
               <a:rPr lang="en-US" dirty="0"/>
@@ -8728,18 +11133,31 @@
             </a:r>
           </a:p>
           <a:p>
-            <a:pPr marL="0" lvl="0" indent="0" algn="l" rtl="0">
-              <a:spcBef>
-                <a:spcPts val="0"/>
-              </a:spcBef>
-              <a:spcAft>
-                <a:spcPts val="0"/>
-              </a:spcAft>
-              <a:buNone/>
+            <a:pPr marL="171450" lvl="0" indent="-171450" algn="l" rtl="0">
+              <a:spcBef>
+                <a:spcPts val="0"/>
+              </a:spcBef>
+              <a:spcAft>
+                <a:spcPts val="0"/>
+              </a:spcAft>
             </a:pPr>
             <a:r>
               <a:rPr lang="en-US" dirty="0"/>
               <a:t>They allow applications to establish connections and exchange data across networks like the internet.</a:t>
+            </a:r>
+          </a:p>
+          <a:p>
+            <a:pPr marL="171450" lvl="0" indent="-171450" algn="l" rtl="0">
+              <a:spcBef>
+                <a:spcPts val="0"/>
+              </a:spcBef>
+              <a:spcAft>
+                <a:spcPts val="0"/>
+              </a:spcAft>
+            </a:pPr>
+            <a:r>
+              <a:rPr lang="en-US" dirty="0"/>
+              <a:t>Relies on client-server model.</a:t>
             </a:r>
           </a:p>
           <a:p>
@@ -10220,7 +12638,292 @@
               </a:spcAft>
               <a:buNone/>
             </a:pPr>
-            <a:endParaRPr dirty="0"/>
+            <a:endParaRPr lang="en-US" dirty="0"/>
+          </a:p>
+          <a:p>
+            <a:pPr marL="0" lvl="0" indent="0" algn="l" rtl="0">
+              <a:spcBef>
+                <a:spcPts val="0"/>
+              </a:spcBef>
+              <a:spcAft>
+                <a:spcPts val="0"/>
+              </a:spcAft>
+              <a:buNone/>
+            </a:pPr>
+            <a:endParaRPr lang="en-US" dirty="0"/>
+          </a:p>
+          <a:p>
+            <a:pPr marL="0" lvl="0" indent="0" algn="l" rtl="0">
+              <a:spcBef>
+                <a:spcPts val="0"/>
+              </a:spcBef>
+              <a:spcAft>
+                <a:spcPts val="0"/>
+              </a:spcAft>
+              <a:buNone/>
+            </a:pPr>
+            <a:r>
+              <a:rPr lang="en-US" dirty="0"/>
+              <a:t>---</a:t>
+            </a:r>
+          </a:p>
+          <a:p>
+            <a:pPr marL="0" lvl="0" indent="0" algn="l" rtl="0">
+              <a:spcBef>
+                <a:spcPts val="0"/>
+              </a:spcBef>
+              <a:spcAft>
+                <a:spcPts val="0"/>
+              </a:spcAft>
+              <a:buNone/>
+            </a:pPr>
+            <a:r>
+              <a:rPr lang="en-US" i="1" u="sng" dirty="0"/>
+              <a:t>For reference:</a:t>
+            </a:r>
+          </a:p>
+          <a:p>
+            <a:pPr marL="0" marR="0" lvl="0" indent="0" algn="l" defTabSz="914400" rtl="0" eaLnBrk="1" fontAlgn="auto" latinLnBrk="0" hangingPunct="1">
+              <a:lnSpc>
+                <a:spcPct val="100000"/>
+              </a:lnSpc>
+              <a:spcBef>
+                <a:spcPts val="0"/>
+              </a:spcBef>
+              <a:spcAft>
+                <a:spcPts val="0"/>
+              </a:spcAft>
+              <a:buClr>
+                <a:srgbClr val="000000"/>
+              </a:buClr>
+              <a:buSzPts val="1100"/>
+              <a:buFont typeface="Arial"/>
+              <a:buNone/>
+              <a:tabLst/>
+              <a:defRPr/>
+            </a:pPr>
+            <a:r>
+              <a:rPr lang="en-US" sz="1100" dirty="0">
+                <a:solidFill>
+                  <a:schemeClr val="dk2"/>
+                </a:solidFill>
+              </a:rPr>
+              <a:t>The steps involved in establishing a TCP socket on the server side are as follows:</a:t>
+            </a:r>
+            <a:endParaRPr lang="en-US" i="1" u="sng" dirty="0"/>
+          </a:p>
+          <a:p>
+            <a:pPr marL="171450" lvl="0" indent="-171450" algn="l" rtl="0">
+              <a:spcBef>
+                <a:spcPts val="0"/>
+              </a:spcBef>
+              <a:spcAft>
+                <a:spcPts val="0"/>
+              </a:spcAft>
+            </a:pPr>
+            <a:r>
+              <a:rPr lang="en-US" sz="1100" dirty="0">
+                <a:solidFill>
+                  <a:schemeClr val="dk2"/>
+                </a:solidFill>
+              </a:rPr>
+              <a:t>Create a socket with the </a:t>
+            </a:r>
+            <a:r>
+              <a:rPr lang="en-US" sz="1100" b="1" dirty="0">
+                <a:solidFill>
+                  <a:schemeClr val="dk2"/>
+                </a:solidFill>
+              </a:rPr>
+              <a:t>socket() </a:t>
+            </a:r>
+            <a:r>
+              <a:rPr lang="en-US" sz="1100" dirty="0">
+                <a:solidFill>
+                  <a:schemeClr val="dk2"/>
+                </a:solidFill>
+              </a:rPr>
+              <a:t>function;</a:t>
+            </a:r>
+          </a:p>
+          <a:p>
+            <a:pPr marL="171450" lvl="0" indent="-171450" algn="l" rtl="0">
+              <a:spcBef>
+                <a:spcPts val="0"/>
+              </a:spcBef>
+              <a:spcAft>
+                <a:spcPts val="0"/>
+              </a:spcAft>
+            </a:pPr>
+            <a:r>
+              <a:rPr lang="en-US" sz="1100" dirty="0">
+                <a:solidFill>
+                  <a:schemeClr val="dk2"/>
+                </a:solidFill>
+              </a:rPr>
+              <a:t>Bind the socket to an address using the </a:t>
+            </a:r>
+            <a:r>
+              <a:rPr lang="en-US" sz="1100" b="1" dirty="0">
+                <a:solidFill>
+                  <a:schemeClr val="dk2"/>
+                </a:solidFill>
+              </a:rPr>
+              <a:t>bind() </a:t>
+            </a:r>
+            <a:r>
+              <a:rPr lang="en-US" sz="1100" dirty="0">
+                <a:solidFill>
+                  <a:schemeClr val="dk2"/>
+                </a:solidFill>
+              </a:rPr>
+              <a:t>function;</a:t>
+            </a:r>
+          </a:p>
+          <a:p>
+            <a:pPr marL="171450" lvl="0" indent="-171450" algn="l" rtl="0">
+              <a:spcBef>
+                <a:spcPts val="0"/>
+              </a:spcBef>
+              <a:spcAft>
+                <a:spcPts val="0"/>
+              </a:spcAft>
+            </a:pPr>
+            <a:r>
+              <a:rPr lang="en-US" sz="1100" dirty="0">
+                <a:solidFill>
+                  <a:schemeClr val="dk2"/>
+                </a:solidFill>
+              </a:rPr>
+              <a:t>Listen for connections with the </a:t>
+            </a:r>
+            <a:r>
+              <a:rPr lang="en-US" sz="1100" b="1" dirty="0">
+                <a:solidFill>
+                  <a:schemeClr val="dk2"/>
+                </a:solidFill>
+              </a:rPr>
+              <a:t>listen()</a:t>
+            </a:r>
+            <a:r>
+              <a:rPr lang="en-US" sz="1100" dirty="0">
+                <a:solidFill>
+                  <a:schemeClr val="dk2"/>
+                </a:solidFill>
+              </a:rPr>
+              <a:t> function;</a:t>
+            </a:r>
+          </a:p>
+          <a:p>
+            <a:pPr marL="171450" lvl="0" indent="-171450" algn="l" rtl="0">
+              <a:spcBef>
+                <a:spcPts val="0"/>
+              </a:spcBef>
+              <a:spcAft>
+                <a:spcPts val="0"/>
+              </a:spcAft>
+            </a:pPr>
+            <a:r>
+              <a:rPr lang="en-US" sz="1100" dirty="0">
+                <a:solidFill>
+                  <a:schemeClr val="dk2"/>
+                </a:solidFill>
+              </a:rPr>
+              <a:t>Accept a connection with the </a:t>
+            </a:r>
+            <a:r>
+              <a:rPr lang="en-US" sz="1100" b="1" dirty="0">
+                <a:solidFill>
+                  <a:schemeClr val="dk2"/>
+                </a:solidFill>
+              </a:rPr>
+              <a:t>accept() </a:t>
+            </a:r>
+            <a:r>
+              <a:rPr lang="en-US" sz="1100" dirty="0">
+                <a:solidFill>
+                  <a:schemeClr val="dk2"/>
+                </a:solidFill>
+              </a:rPr>
+              <a:t>function system call. </a:t>
+            </a:r>
+            <a:br>
+              <a:rPr lang="en-US" sz="1100" dirty="0">
+                <a:solidFill>
+                  <a:schemeClr val="dk2"/>
+                </a:solidFill>
+              </a:rPr>
+            </a:br>
+            <a:r>
+              <a:rPr lang="en-US" sz="1100" dirty="0">
+                <a:solidFill>
+                  <a:schemeClr val="dk2"/>
+                </a:solidFill>
+              </a:rPr>
+              <a:t>This call typically blocks until a client connects with the server.</a:t>
+            </a:r>
+          </a:p>
+          <a:p>
+            <a:pPr marL="171450" lvl="0" indent="-171450" algn="l" rtl="0">
+              <a:spcBef>
+                <a:spcPts val="0"/>
+              </a:spcBef>
+              <a:spcAft>
+                <a:spcPts val="0"/>
+              </a:spcAft>
+            </a:pPr>
+            <a:r>
+              <a:rPr lang="en-US" sz="1100" dirty="0">
+                <a:solidFill>
+                  <a:schemeClr val="dk2"/>
+                </a:solidFill>
+              </a:rPr>
+              <a:t>Send and receive data by means of </a:t>
+            </a:r>
+            <a:r>
+              <a:rPr lang="en-US" sz="1100" b="1" dirty="0">
+                <a:solidFill>
+                  <a:schemeClr val="dk2"/>
+                </a:solidFill>
+              </a:rPr>
+              <a:t>send() </a:t>
+            </a:r>
+            <a:r>
+              <a:rPr lang="en-US" sz="1100" dirty="0">
+                <a:solidFill>
+                  <a:schemeClr val="dk2"/>
+                </a:solidFill>
+              </a:rPr>
+              <a:t>and </a:t>
+            </a:r>
+            <a:r>
+              <a:rPr lang="en-US" sz="1100" b="1" dirty="0">
+                <a:solidFill>
+                  <a:schemeClr val="dk2"/>
+                </a:solidFill>
+              </a:rPr>
+              <a:t>receive()</a:t>
+            </a:r>
+            <a:r>
+              <a:rPr lang="en-US" sz="1100" dirty="0">
+                <a:solidFill>
+                  <a:schemeClr val="dk2"/>
+                </a:solidFill>
+              </a:rPr>
+              <a:t>.</a:t>
+            </a:r>
+          </a:p>
+          <a:p>
+            <a:pPr marL="0" lvl="0" indent="0" algn="l" rtl="0">
+              <a:spcBef>
+                <a:spcPts val="0"/>
+              </a:spcBef>
+              <a:spcAft>
+                <a:spcPts val="0"/>
+              </a:spcAft>
+              <a:buNone/>
+            </a:pPr>
+            <a:endParaRPr lang="en-US" dirty="0"/>
           </a:p>
         </p:txBody>
       </p:sp>
@@ -10388,12 +13091,28 @@
               <a:rPr lang="en-US" dirty="0"/>
               <a:t>: </a:t>
             </a:r>
-            <a:br>
-              <a:rPr lang="en-US" dirty="0"/>
-            </a:br>
-            <a:r>
-              <a:rPr lang="en-US" dirty="0"/>
-              <a:t>Small geographical area (e.g., one building), high speed, low latency, and high security .</a:t>
+          </a:p>
+          <a:p>
+            <a:pPr marL="171450" marR="0" lvl="0" indent="-171450" algn="l" defTabSz="914400" rtl="0" eaLnBrk="1" fontAlgn="auto" latinLnBrk="0" hangingPunct="1">
+              <a:lnSpc>
+                <a:spcPct val="100000"/>
+              </a:lnSpc>
+              <a:spcBef>
+                <a:spcPts val="0"/>
+              </a:spcBef>
+              <a:spcAft>
+                <a:spcPts val="0"/>
+              </a:spcAft>
+              <a:buClr>
+                <a:srgbClr val="000000"/>
+              </a:buClr>
+              <a:buSzPts val="1100"/>
+              <a:tabLst/>
+              <a:defRPr/>
+            </a:pPr>
+            <a:r>
+              <a:rPr lang="en-US" dirty="0"/>
+              <a:t>Small geographical area (e.g., one building), high speed, low latency, and high security.</a:t>
             </a:r>
           </a:p>
           <a:p>
@@ -11450,16 +14169,48 @@
               <a:rPr lang="en-US" dirty="0"/>
               <a:t>: </a:t>
             </a:r>
-            <a:br>
-              <a:rPr lang="en-US" dirty="0"/>
-            </a:br>
+          </a:p>
+          <a:p>
+            <a:pPr marL="171450" marR="0" lvl="0" indent="-171450" algn="l" defTabSz="914400" rtl="0" eaLnBrk="1" fontAlgn="auto" latinLnBrk="0" hangingPunct="1">
+              <a:lnSpc>
+                <a:spcPct val="100000"/>
+              </a:lnSpc>
+              <a:spcBef>
+                <a:spcPts val="0"/>
+              </a:spcBef>
+              <a:spcAft>
+                <a:spcPts val="0"/>
+              </a:spcAft>
+              <a:buClr>
+                <a:srgbClr val="000000"/>
+              </a:buClr>
+              <a:buSzPts val="1100"/>
+              <a:tabLst/>
+              <a:defRPr/>
+            </a:pPr>
             <a:r>
               <a:rPr lang="en-US" dirty="0"/>
               <a:t>Large area (e.g., cities or continents), lower speeds, higher latency, and lower security. </a:t>
             </a:r>
-            <a:br>
-              <a:rPr lang="en-US" dirty="0"/>
-            </a:br>
+          </a:p>
+          <a:p>
+            <a:pPr marL="171450" marR="0" lvl="0" indent="-171450" algn="l" defTabSz="914400" rtl="0" eaLnBrk="1" fontAlgn="auto" latinLnBrk="0" hangingPunct="1">
+              <a:lnSpc>
+                <a:spcPct val="100000"/>
+              </a:lnSpc>
+              <a:spcBef>
+                <a:spcPts val="0"/>
+              </a:spcBef>
+              <a:spcAft>
+                <a:spcPts val="0"/>
+              </a:spcAft>
+              <a:buClr>
+                <a:srgbClr val="000000"/>
+              </a:buClr>
+              <a:buSzPts val="1100"/>
+              <a:tabLst/>
+              <a:defRPr/>
+            </a:pPr>
             <a:r>
               <a:rPr lang="en-US" dirty="0"/>
               <a:t>The Internet is the largest example.</a:t>
@@ -11835,14 +14586,13 @@
             </a:r>
           </a:p>
           <a:p>
-            <a:pPr marL="0" lvl="0" indent="0" algn="l" rtl="0">
-              <a:spcBef>
-                <a:spcPts val="0"/>
-              </a:spcBef>
-              <a:spcAft>
-                <a:spcPts val="0"/>
-              </a:spcAft>
-              <a:buNone/>
+            <a:pPr marL="171450" lvl="0" indent="-171450" algn="l" rtl="0">
+              <a:spcBef>
+                <a:spcPts val="0"/>
+              </a:spcBef>
+              <a:spcAft>
+                <a:spcPts val="0"/>
+              </a:spcAft>
             </a:pPr>
             <a:r>
               <a:rPr lang="en-US" dirty="0"/>
@@ -11850,14 +14600,13 @@
             </a:r>
           </a:p>
           <a:p>
-            <a:pPr marL="0" lvl="0" indent="0" algn="l" rtl="0">
-              <a:spcBef>
-                <a:spcPts val="0"/>
-              </a:spcBef>
-              <a:spcAft>
-                <a:spcPts val="0"/>
-              </a:spcAft>
-              <a:buNone/>
+            <a:pPr marL="171450" lvl="0" indent="-171450" algn="l" rtl="0">
+              <a:spcBef>
+                <a:spcPts val="0"/>
+              </a:spcBef>
+              <a:spcAft>
+                <a:spcPts val="0"/>
+              </a:spcAft>
             </a:pPr>
             <a:r>
               <a:rPr lang="en-US" dirty="0"/>
@@ -12328,7 +15077,7 @@
             </a:r>
           </a:p>
           <a:p>
-            <a:pPr marL="0" marR="0" lvl="0" indent="0" algn="l" defTabSz="914400" rtl="0" eaLnBrk="1" fontAlgn="auto" latinLnBrk="0" hangingPunct="1">
+            <a:pPr marL="171450" marR="0" lvl="0" indent="-171450" algn="l" defTabSz="914400" rtl="0" eaLnBrk="1" fontAlgn="auto" latinLnBrk="0" hangingPunct="1">
               <a:lnSpc>
                 <a:spcPct val="100000"/>
               </a:lnSpc>
@@ -12342,8 +15091,6 @@
                 <a:srgbClr val="000000"/>
               </a:buClr>
               <a:buSzPts val="1100"/>
-              <a:buFont typeface="Arial"/>
-              <a:buNone/>
               <a:tabLst/>
               <a:defRPr/>
             </a:pPr>
@@ -12362,7 +15109,7 @@
             </a:r>
           </a:p>
           <a:p>
-            <a:pPr marL="0" marR="0" lvl="0" indent="0" algn="l" defTabSz="914400" rtl="0" eaLnBrk="1" fontAlgn="auto" latinLnBrk="0" hangingPunct="1">
+            <a:pPr marL="171450" marR="0" lvl="0" indent="-171450" algn="l" defTabSz="914400" rtl="0" eaLnBrk="1" fontAlgn="auto" latinLnBrk="0" hangingPunct="1">
               <a:lnSpc>
                 <a:spcPct val="100000"/>
               </a:lnSpc>
@@ -12376,8 +15123,6 @@
                 <a:srgbClr val="000000"/>
               </a:buClr>
               <a:buSzPts val="1100"/>
-              <a:buFont typeface="Arial"/>
-              <a:buNone/>
               <a:tabLst/>
               <a:defRPr/>
             </a:pPr>
@@ -12392,7 +15137,7 @@
                 <a:cs typeface="Arial"/>
                 <a:sym typeface="Arial"/>
               </a:rPr>
-              <a:t>It defines the remote host address, port, local port, and the chosen protocol (UDP or TCP).</a:t>
+              <a:t>It defines the remote host address, remote port, local port, and the chosen protocol (UDP or TCP).</a:t>
             </a:r>
             <a:endParaRPr lang="en-US" dirty="0"/>
           </a:p>
@@ -30693,7 +33438,22 @@
                   <a:schemeClr val="dk1"/>
                 </a:solidFill>
               </a:rPr>
-              <a:t> client TCP establishes connection to server TCP</a:t>
+              <a:t> </a:t>
+            </a:r>
+            <a:br>
+              <a:rPr lang="en-US" sz="1600" dirty="0">
+                <a:solidFill>
+                  <a:schemeClr val="dk1"/>
+                </a:solidFill>
+              </a:rPr>
+            </a:br>
+            <a:r>
+              <a:rPr lang="en-US" sz="1600" dirty="0">
+                <a:solidFill>
+                  <a:schemeClr val="dk1"/>
+                </a:solidFill>
+              </a:rPr>
+              <a:t>Client TCP establishes connection to server TCP</a:t>
             </a:r>
             <a:endParaRPr sz="1600" dirty="0">
               <a:solidFill>
@@ -36576,14 +39336,14 @@
               <a:buNone/>
             </a:pPr>
             <a:r>
-              <a:rPr lang="en-US" sz="2000">
+              <a:rPr lang="en-US" sz="2000" dirty="0">
                 <a:solidFill>
                   <a:schemeClr val="dk2"/>
                 </a:solidFill>
               </a:rPr>
               <a:t>Two main byte order conventions:</a:t>
             </a:r>
-            <a:endParaRPr sz="2000">
+            <a:endParaRPr sz="2000" dirty="0">
               <a:solidFill>
                 <a:schemeClr val="dk2"/>
               </a:solidFill>
@@ -37439,7 +40199,22 @@
                   <a:schemeClr val="dk2"/>
                 </a:solidFill>
               </a:rPr>
-              <a:t>, meaning the most significant byte (MSB) is transmitted first, followed by the least significant byte (LSB).</a:t>
+              <a:t>, meaning the most significant byte (MSB) is transmitted first, </a:t>
+            </a:r>
+            <a:br>
+              <a:rPr lang="en-US" sz="1800" dirty="0">
+                <a:solidFill>
+                  <a:schemeClr val="dk2"/>
+                </a:solidFill>
+              </a:rPr>
+            </a:br>
+            <a:r>
+              <a:rPr lang="en-US" sz="1800" dirty="0">
+                <a:solidFill>
+                  <a:schemeClr val="dk2"/>
+                </a:solidFill>
+              </a:rPr>
+              <a:t>followed by the least significant byte (LSB).</a:t>
             </a:r>
             <a:endParaRPr sz="1800" dirty="0">
               <a:solidFill>
@@ -37731,7 +40506,22 @@
                   <a:schemeClr val="dk2"/>
                 </a:solidFill>
               </a:rPr>
-              <a:t>Little-endian byte order is efficient for CPU operations like addition and subtraction, as it aligns with how CPUs process data.</a:t>
+              <a:t>Little-endian byte order is efficient for CPU operations like addition and subtraction, </a:t>
+            </a:r>
+            <a:br>
+              <a:rPr lang="en-US" sz="1800" dirty="0">
+                <a:solidFill>
+                  <a:schemeClr val="dk2"/>
+                </a:solidFill>
+              </a:rPr>
+            </a:br>
+            <a:r>
+              <a:rPr lang="en-US" sz="1800" dirty="0">
+                <a:solidFill>
+                  <a:schemeClr val="dk2"/>
+                </a:solidFill>
+              </a:rPr>
+              <a:t>as it aligns with how CPUs process data.</a:t>
             </a:r>
             <a:endParaRPr sz="1800" dirty="0">
               <a:solidFill>
@@ -39852,7 +42642,7 @@
         <p:spPr>
           <a:xfrm>
             <a:off x="398200" y="1563939"/>
-            <a:ext cx="5276100" cy="5067383"/>
+            <a:ext cx="5395300" cy="5067383"/>
           </a:xfrm>
           <a:prstGeom prst="rect">
             <a:avLst/>
@@ -40047,7 +42837,15 @@
                   <a:schemeClr val="dk2"/>
                 </a:solidFill>
               </a:rPr>
-              <a:t>one computer acts as a server</a:t>
+              <a:t>one computer acts as a </a:t>
+            </a:r>
+            <a:r>
+              <a:rPr lang="en-US" sz="1800" b="1" u="sng" dirty="0">
+                <a:solidFill>
+                  <a:schemeClr val="dk2"/>
+                </a:solidFill>
+              </a:rPr>
+              <a:t>server</a:t>
             </a:r>
             <a:r>
               <a:rPr lang="en-US" sz="1800" dirty="0">
@@ -40063,7 +42861,15 @@
                   <a:schemeClr val="dk2"/>
                 </a:solidFill>
               </a:rPr>
-              <a:t>other acts as a client</a:t>
+              <a:t>other acts as a </a:t>
+            </a:r>
+            <a:r>
+              <a:rPr lang="en-US" sz="1800" b="1" u="sng" dirty="0">
+                <a:solidFill>
+                  <a:schemeClr val="dk2"/>
+                </a:solidFill>
+              </a:rPr>
+              <a:t>client</a:t>
             </a:r>
             <a:r>
               <a:rPr lang="en-US" sz="1800" dirty="0">
@@ -41481,7 +44287,7 @@
                   <a:schemeClr val="dk1"/>
                 </a:solidFill>
               </a:rPr>
-              <a:t>High data transfer rates, low latency, and high security</a:t>
+              <a:t>Characteristics: High data transfer rates, low latency, and high security</a:t>
             </a:r>
             <a:endParaRPr sz="1800" dirty="0">
               <a:solidFill>
@@ -41859,7 +44665,7 @@
                   <a:schemeClr val="dk2"/>
                 </a:solidFill>
               </a:rPr>
-              <a:t>Lower data transfer rates, higher latency, and lower security compared to LANs due to the larger distances and the involvement of multiple service providers.</a:t>
+              <a:t>Characteristics: Lower data transfer rates, higher latency, and lower security compared to LANs due to the larger distances and the involvement of multiple service providers.</a:t>
             </a:r>
             <a:endParaRPr sz="1600" dirty="0">
               <a:solidFill>
@@ -42436,7 +45242,7 @@
         </p:nvSpPr>
         <p:spPr>
           <a:xfrm>
-            <a:off x="403725" y="1786683"/>
+            <a:off x="403725" y="1732895"/>
             <a:ext cx="5612100" cy="5067383"/>
           </a:xfrm>
           <a:prstGeom prst="rect">
@@ -42538,7 +45344,7 @@
                   <a:schemeClr val="dk1"/>
                 </a:solidFill>
               </a:rPr>
-              <a:t> ( UDP or TCP). </a:t>
+              <a:t> (UDP or TCP). </a:t>
             </a:r>
             <a:endParaRPr sz="1800" dirty="0">
               <a:solidFill>
@@ -42569,7 +45375,7 @@
                   <a:schemeClr val="dk1"/>
                 </a:solidFill>
               </a:rPr>
-              <a:t>A socket does not specify the direction of the data transfer, each socket can handle bi-directional transfers. </a:t>
+              <a:t>A socket does not specify the direction of the data transfer; each socket can handle bi-directional transfers. </a:t>
             </a:r>
             <a:endParaRPr sz="1800" dirty="0">
               <a:solidFill>

--- a/Lecture Slides/22 - Networking - Socket Programming.pptx
+++ b/Lecture Slides/22 - Networking - Socket Programming.pptx
@@ -830,6 +830,41 @@
             </a:pPr>
             <a:endParaRPr lang="en-US" dirty="0"/>
           </a:p>
+          <a:p>
+            <a:pPr marL="0" lvl="0" indent="0" algn="l" rtl="0">
+              <a:spcBef>
+                <a:spcPts val="0"/>
+              </a:spcBef>
+              <a:spcAft>
+                <a:spcPts val="0"/>
+              </a:spcAft>
+              <a:buNone/>
+            </a:pPr>
+            <a:r>
+              <a:rPr lang="en-US"/>
+              <a:t>OSI: </a:t>
+            </a:r>
+            <a:r>
+              <a:rPr lang="en-US" sz="1100">
+                <a:solidFill>
+                  <a:schemeClr val="dk2"/>
+                </a:solidFill>
+              </a:rPr>
+              <a:t>Open Systems Interconnection</a:t>
+            </a:r>
+          </a:p>
+          <a:p>
+            <a:pPr marL="0" lvl="0" indent="0" algn="l" rtl="0">
+              <a:spcBef>
+                <a:spcPts val="0"/>
+              </a:spcBef>
+              <a:spcAft>
+                <a:spcPts val="0"/>
+              </a:spcAft>
+              <a:buNone/>
+            </a:pPr>
+            <a:endParaRPr lang="en-US" dirty="0"/>
+          </a:p>
         </p:txBody>
       </p:sp>
       <p:sp>
@@ -7664,6 +7699,59 @@
               </a:spcAft>
               <a:buNone/>
             </a:pPr>
+            <a:r>
+              <a:rPr lang="en-US" b="1" dirty="0"/>
+              <a:t>Computer Memory:</a:t>
+            </a:r>
+          </a:p>
+          <a:p>
+            <a:pPr marL="0" lvl="0" indent="0" algn="l" rtl="0">
+              <a:spcBef>
+                <a:spcPts val="0"/>
+              </a:spcBef>
+              <a:spcAft>
+                <a:spcPts val="0"/>
+              </a:spcAft>
+              <a:buNone/>
+            </a:pPr>
+            <a:r>
+              <a:rPr lang="en-US" dirty="0"/>
+              <a:t>Physical memory is logically organized as a </a:t>
+            </a:r>
+            <a:r>
+              <a:rPr lang="en-US" b="1" dirty="0"/>
+              <a:t>contiguous, byte-addressable sequence</a:t>
+            </a:r>
+            <a:r>
+              <a:rPr lang="en-US" dirty="0"/>
+              <a:t>, </a:t>
+            </a:r>
+          </a:p>
+          <a:p>
+            <a:pPr marL="0" lvl="0" indent="0" algn="l" rtl="0">
+              <a:spcBef>
+                <a:spcPts val="0"/>
+              </a:spcBef>
+              <a:spcAft>
+                <a:spcPts val="0"/>
+              </a:spcAft>
+              <a:buNone/>
+            </a:pPr>
+            <a:r>
+              <a:rPr lang="en-US" dirty="0"/>
+              <a:t>where each 8-bit unit is assigned a unique numerical address.</a:t>
+            </a:r>
+          </a:p>
+          <a:p>
+            <a:pPr marL="0" lvl="0" indent="0" algn="l" rtl="0">
+              <a:spcBef>
+                <a:spcPts val="0"/>
+              </a:spcBef>
+              <a:spcAft>
+                <a:spcPts val="0"/>
+              </a:spcAft>
+              <a:buNone/>
+            </a:pPr>
             <a:endParaRPr lang="en-US" dirty="0"/>
           </a:p>
           <a:p>
@@ -7967,6 +8055,36 @@
               </a:spcAft>
               <a:buNone/>
             </a:pPr>
+            <a:r>
+              <a:rPr lang="en-US" b="1" dirty="0"/>
+              <a:t>Q. </a:t>
+            </a:r>
+            <a:r>
+              <a:rPr lang="en-US" dirty="0"/>
+              <a:t>What part of the 32-bit quantity is stored at each byte address?</a:t>
+            </a:r>
+            <a:br>
+              <a:rPr lang="en-US" dirty="0"/>
+            </a:br>
+            <a:r>
+              <a:rPr lang="en-US" b="1" dirty="0"/>
+              <a:t>A.</a:t>
+            </a:r>
+            <a:r>
+              <a:rPr lang="en-US" dirty="0"/>
+              <a:t> It depends on endianness.</a:t>
+            </a:r>
+          </a:p>
+          <a:p>
+            <a:pPr marL="0" lvl="0" indent="0" algn="l" rtl="0">
+              <a:spcBef>
+                <a:spcPts val="0"/>
+              </a:spcBef>
+              <a:spcAft>
+                <a:spcPts val="0"/>
+              </a:spcAft>
+              <a:buNone/>
+            </a:pPr>
             <a:endParaRPr lang="en-US" dirty="0"/>
           </a:p>
           <a:p>
@@ -9365,7 +9483,198 @@
               </a:spcAft>
               <a:buNone/>
             </a:pPr>
-            <a:endParaRPr/>
+            <a:r>
+              <a:rPr lang="en-US" b="1" dirty="0"/>
+              <a:t>Byte Order (Endianness)</a:t>
+            </a:r>
+            <a:r>
+              <a:rPr lang="en-US" dirty="0"/>
+              <a:t>:</a:t>
+            </a:r>
+          </a:p>
+          <a:p>
+            <a:pPr marL="171450" lvl="0" indent="-171450" algn="l" rtl="0">
+              <a:spcBef>
+                <a:spcPts val="0"/>
+              </a:spcBef>
+              <a:spcAft>
+                <a:spcPts val="0"/>
+              </a:spcAft>
+            </a:pPr>
+            <a:r>
+              <a:rPr lang="en-US" sz="1100" b="1" i="0" u="none" strike="noStrike" cap="none" dirty="0">
+                <a:solidFill>
+                  <a:srgbClr val="000000"/>
+                </a:solidFill>
+                <a:effectLst/>
+                <a:latin typeface="Arial"/>
+                <a:ea typeface="Arial"/>
+                <a:cs typeface="Arial"/>
+                <a:sym typeface="Arial"/>
+              </a:rPr>
+              <a:t>Big-Endian (Network Byte Order)</a:t>
+            </a:r>
+            <a:r>
+              <a:rPr lang="en-US" sz="1100" b="0" i="0" u="none" strike="noStrike" cap="none" dirty="0">
+                <a:solidFill>
+                  <a:srgbClr val="000000"/>
+                </a:solidFill>
+                <a:effectLst/>
+                <a:latin typeface="Arial"/>
+                <a:ea typeface="Arial"/>
+                <a:cs typeface="Arial"/>
+                <a:sym typeface="Arial"/>
+              </a:rPr>
+              <a:t>: </a:t>
+            </a:r>
+            <a:br>
+              <a:rPr lang="en-US" sz="1100" b="0" i="0" u="none" strike="noStrike" cap="none" dirty="0">
+                <a:solidFill>
+                  <a:srgbClr val="000000"/>
+                </a:solidFill>
+                <a:effectLst/>
+                <a:latin typeface="Arial"/>
+                <a:ea typeface="Arial"/>
+                <a:cs typeface="Arial"/>
+                <a:sym typeface="Arial"/>
+              </a:rPr>
+            </a:br>
+            <a:r>
+              <a:rPr lang="en-US" sz="1100" b="0" i="0" u="none" strike="noStrike" cap="none" dirty="0">
+                <a:solidFill>
+                  <a:srgbClr val="000000"/>
+                </a:solidFill>
+                <a:effectLst/>
+                <a:latin typeface="Arial"/>
+                <a:ea typeface="Arial"/>
+                <a:cs typeface="Arial"/>
+                <a:sym typeface="Arial"/>
+              </a:rPr>
+              <a:t>Most significant byte (MSB) is stored at the lowest address. </a:t>
+            </a:r>
+            <a:br>
+              <a:rPr lang="en-US" sz="1100" b="0" i="0" u="none" strike="noStrike" cap="none" dirty="0">
+                <a:solidFill>
+                  <a:srgbClr val="000000"/>
+                </a:solidFill>
+                <a:effectLst/>
+                <a:latin typeface="Arial"/>
+                <a:ea typeface="Arial"/>
+                <a:cs typeface="Arial"/>
+                <a:sym typeface="Arial"/>
+              </a:rPr>
+            </a:br>
+            <a:r>
+              <a:rPr lang="en-US" sz="1100" b="0" i="0" u="none" strike="noStrike" cap="none" dirty="0">
+                <a:solidFill>
+                  <a:srgbClr val="000000"/>
+                </a:solidFill>
+                <a:effectLst/>
+                <a:latin typeface="Arial"/>
+                <a:ea typeface="Arial"/>
+                <a:cs typeface="Arial"/>
+                <a:sym typeface="Arial"/>
+              </a:rPr>
+              <a:t>Used for transmitting data over networks.</a:t>
+            </a:r>
+          </a:p>
+          <a:p>
+            <a:pPr marL="171450" lvl="0" indent="-171450" algn="l" rtl="0">
+              <a:spcBef>
+                <a:spcPts val="0"/>
+              </a:spcBef>
+              <a:spcAft>
+                <a:spcPts val="0"/>
+              </a:spcAft>
+            </a:pPr>
+            <a:r>
+              <a:rPr lang="en-US" sz="1100" b="1" i="0" u="none" strike="noStrike" cap="none" dirty="0">
+                <a:solidFill>
+                  <a:srgbClr val="000000"/>
+                </a:solidFill>
+                <a:effectLst/>
+                <a:latin typeface="Arial"/>
+                <a:ea typeface="Arial"/>
+                <a:cs typeface="Arial"/>
+                <a:sym typeface="Arial"/>
+              </a:rPr>
+              <a:t>Little-Endian (Host Byte Order)</a:t>
+            </a:r>
+            <a:r>
+              <a:rPr lang="en-US" sz="1100" b="0" i="0" u="none" strike="noStrike" cap="none" dirty="0">
+                <a:solidFill>
+                  <a:srgbClr val="000000"/>
+                </a:solidFill>
+                <a:effectLst/>
+                <a:latin typeface="Arial"/>
+                <a:ea typeface="Arial"/>
+                <a:cs typeface="Arial"/>
+                <a:sym typeface="Arial"/>
+              </a:rPr>
+              <a:t>: </a:t>
+            </a:r>
+            <a:br>
+              <a:rPr lang="en-US" sz="1100" b="0" i="0" u="none" strike="noStrike" cap="none" dirty="0">
+                <a:solidFill>
+                  <a:srgbClr val="000000"/>
+                </a:solidFill>
+                <a:effectLst/>
+                <a:latin typeface="Arial"/>
+                <a:ea typeface="Arial"/>
+                <a:cs typeface="Arial"/>
+                <a:sym typeface="Arial"/>
+              </a:rPr>
+            </a:br>
+            <a:r>
+              <a:rPr lang="en-US" sz="1100" b="0" i="0" u="none" strike="noStrike" cap="none" dirty="0">
+                <a:solidFill>
+                  <a:srgbClr val="000000"/>
+                </a:solidFill>
+                <a:effectLst/>
+                <a:latin typeface="Arial"/>
+                <a:ea typeface="Arial"/>
+                <a:cs typeface="Arial"/>
+                <a:sym typeface="Arial"/>
+              </a:rPr>
+              <a:t>Least significant byte (LSB) is at the lowest address. </a:t>
+            </a:r>
+            <a:br>
+              <a:rPr lang="en-US" sz="1100" b="0" i="0" u="none" strike="noStrike" cap="none" dirty="0">
+                <a:solidFill>
+                  <a:srgbClr val="000000"/>
+                </a:solidFill>
+                <a:effectLst/>
+                <a:latin typeface="Arial"/>
+                <a:ea typeface="Arial"/>
+                <a:cs typeface="Arial"/>
+                <a:sym typeface="Arial"/>
+              </a:rPr>
+            </a:br>
+            <a:r>
+              <a:rPr lang="en-US" sz="1100" b="0" i="0" u="none" strike="noStrike" cap="none" dirty="0">
+                <a:solidFill>
+                  <a:srgbClr val="000000"/>
+                </a:solidFill>
+                <a:effectLst/>
+                <a:latin typeface="Arial"/>
+                <a:ea typeface="Arial"/>
+                <a:cs typeface="Arial"/>
+                <a:sym typeface="Arial"/>
+              </a:rPr>
+              <a:t>Common in x86-based CPUs for efficient processing.</a:t>
+            </a:r>
+          </a:p>
+          <a:p>
+            <a:pPr marL="0" lvl="0" indent="0" algn="l" rtl="0">
+              <a:spcBef>
+                <a:spcPts val="0"/>
+              </a:spcBef>
+              <a:spcAft>
+                <a:spcPts val="0"/>
+              </a:spcAft>
+              <a:buNone/>
+            </a:pPr>
+            <a:endParaRPr dirty="0"/>
           </a:p>
         </p:txBody>
       </p:sp>
@@ -9469,7 +9778,616 @@
               </a:spcAft>
               <a:buNone/>
             </a:pPr>
-            <a:endParaRPr/>
+            <a:r>
+              <a:rPr lang="en-US" b="1" dirty="0"/>
+              <a:t>Byte Order (Endianness)</a:t>
+            </a:r>
+            <a:r>
+              <a:rPr lang="en-US" dirty="0"/>
+              <a:t>:</a:t>
+            </a:r>
+          </a:p>
+          <a:p>
+            <a:pPr marL="171450" lvl="0" indent="-171450" algn="l" rtl="0">
+              <a:spcBef>
+                <a:spcPts val="0"/>
+              </a:spcBef>
+              <a:spcAft>
+                <a:spcPts val="0"/>
+              </a:spcAft>
+            </a:pPr>
+            <a:r>
+              <a:rPr lang="en-US" sz="1100" b="1" i="0" u="none" strike="noStrike" cap="none" dirty="0">
+                <a:solidFill>
+                  <a:srgbClr val="000000"/>
+                </a:solidFill>
+                <a:effectLst/>
+                <a:latin typeface="Arial"/>
+                <a:ea typeface="Arial"/>
+                <a:cs typeface="Arial"/>
+                <a:sym typeface="Arial"/>
+              </a:rPr>
+              <a:t>Big-Endian (Network Byte Order)</a:t>
+            </a:r>
+            <a:r>
+              <a:rPr lang="en-US" sz="1100" b="0" i="0" u="none" strike="noStrike" cap="none" dirty="0">
+                <a:solidFill>
+                  <a:srgbClr val="000000"/>
+                </a:solidFill>
+                <a:effectLst/>
+                <a:latin typeface="Arial"/>
+                <a:ea typeface="Arial"/>
+                <a:cs typeface="Arial"/>
+                <a:sym typeface="Arial"/>
+              </a:rPr>
+              <a:t>: </a:t>
+            </a:r>
+            <a:br>
+              <a:rPr lang="en-US" sz="1100" b="0" i="0" u="none" strike="noStrike" cap="none" dirty="0">
+                <a:solidFill>
+                  <a:srgbClr val="000000"/>
+                </a:solidFill>
+                <a:effectLst/>
+                <a:latin typeface="Arial"/>
+                <a:ea typeface="Arial"/>
+                <a:cs typeface="Arial"/>
+                <a:sym typeface="Arial"/>
+              </a:rPr>
+            </a:br>
+            <a:r>
+              <a:rPr lang="en-US" sz="1100" b="0" i="0" u="none" strike="noStrike" cap="none" dirty="0">
+                <a:solidFill>
+                  <a:srgbClr val="000000"/>
+                </a:solidFill>
+                <a:effectLst/>
+                <a:latin typeface="Arial"/>
+                <a:ea typeface="Arial"/>
+                <a:cs typeface="Arial"/>
+                <a:sym typeface="Arial"/>
+              </a:rPr>
+              <a:t>Most significant byte (MSB) is stored at the lowest address. </a:t>
+            </a:r>
+            <a:br>
+              <a:rPr lang="en-US" sz="1100" b="0" i="0" u="none" strike="noStrike" cap="none" dirty="0">
+                <a:solidFill>
+                  <a:srgbClr val="000000"/>
+                </a:solidFill>
+                <a:effectLst/>
+                <a:latin typeface="Arial"/>
+                <a:ea typeface="Arial"/>
+                <a:cs typeface="Arial"/>
+                <a:sym typeface="Arial"/>
+              </a:rPr>
+            </a:br>
+            <a:r>
+              <a:rPr lang="en-US" sz="1100" b="0" i="0" u="none" strike="noStrike" cap="none" dirty="0">
+                <a:solidFill>
+                  <a:srgbClr val="000000"/>
+                </a:solidFill>
+                <a:effectLst/>
+                <a:latin typeface="Arial"/>
+                <a:ea typeface="Arial"/>
+                <a:cs typeface="Arial"/>
+                <a:sym typeface="Arial"/>
+              </a:rPr>
+              <a:t>Used for transmitting data over networks.</a:t>
+            </a:r>
+          </a:p>
+          <a:p>
+            <a:pPr marL="171450" lvl="0" indent="-171450" algn="l" rtl="0">
+              <a:spcBef>
+                <a:spcPts val="0"/>
+              </a:spcBef>
+              <a:spcAft>
+                <a:spcPts val="0"/>
+              </a:spcAft>
+            </a:pPr>
+            <a:r>
+              <a:rPr lang="en-US" sz="1100" b="1" i="0" u="none" strike="noStrike" cap="none" dirty="0">
+                <a:solidFill>
+                  <a:srgbClr val="000000"/>
+                </a:solidFill>
+                <a:effectLst/>
+                <a:latin typeface="Arial"/>
+                <a:ea typeface="Arial"/>
+                <a:cs typeface="Arial"/>
+                <a:sym typeface="Arial"/>
+              </a:rPr>
+              <a:t>Little-Endian (Host Byte Order)</a:t>
+            </a:r>
+            <a:r>
+              <a:rPr lang="en-US" sz="1100" b="0" i="0" u="none" strike="noStrike" cap="none" dirty="0">
+                <a:solidFill>
+                  <a:srgbClr val="000000"/>
+                </a:solidFill>
+                <a:effectLst/>
+                <a:latin typeface="Arial"/>
+                <a:ea typeface="Arial"/>
+                <a:cs typeface="Arial"/>
+                <a:sym typeface="Arial"/>
+              </a:rPr>
+              <a:t>: </a:t>
+            </a:r>
+            <a:br>
+              <a:rPr lang="en-US" sz="1100" b="0" i="0" u="none" strike="noStrike" cap="none" dirty="0">
+                <a:solidFill>
+                  <a:srgbClr val="000000"/>
+                </a:solidFill>
+                <a:effectLst/>
+                <a:latin typeface="Arial"/>
+                <a:ea typeface="Arial"/>
+                <a:cs typeface="Arial"/>
+                <a:sym typeface="Arial"/>
+              </a:rPr>
+            </a:br>
+            <a:r>
+              <a:rPr lang="en-US" sz="1100" b="0" i="0" u="none" strike="noStrike" cap="none" dirty="0">
+                <a:solidFill>
+                  <a:srgbClr val="000000"/>
+                </a:solidFill>
+                <a:effectLst/>
+                <a:latin typeface="Arial"/>
+                <a:ea typeface="Arial"/>
+                <a:cs typeface="Arial"/>
+                <a:sym typeface="Arial"/>
+              </a:rPr>
+              <a:t>Least significant byte (LSB) is at the lowest address. </a:t>
+            </a:r>
+            <a:br>
+              <a:rPr lang="en-US" sz="1100" b="0" i="0" u="none" strike="noStrike" cap="none" dirty="0">
+                <a:solidFill>
+                  <a:srgbClr val="000000"/>
+                </a:solidFill>
+                <a:effectLst/>
+                <a:latin typeface="Arial"/>
+                <a:ea typeface="Arial"/>
+                <a:cs typeface="Arial"/>
+                <a:sym typeface="Arial"/>
+              </a:rPr>
+            </a:br>
+            <a:r>
+              <a:rPr lang="en-US" sz="1100" b="0" i="0" u="none" strike="noStrike" cap="none" dirty="0">
+                <a:solidFill>
+                  <a:srgbClr val="000000"/>
+                </a:solidFill>
+                <a:effectLst/>
+                <a:latin typeface="Arial"/>
+                <a:ea typeface="Arial"/>
+                <a:cs typeface="Arial"/>
+                <a:sym typeface="Arial"/>
+              </a:rPr>
+              <a:t>Common in x86-based CPUs for efficient processing.</a:t>
+            </a:r>
+          </a:p>
+          <a:p>
+            <a:pPr marL="0" lvl="0" indent="0" algn="l" rtl="0">
+              <a:spcBef>
+                <a:spcPts val="0"/>
+              </a:spcBef>
+              <a:spcAft>
+                <a:spcPts val="0"/>
+              </a:spcAft>
+              <a:buNone/>
+            </a:pPr>
+            <a:endParaRPr lang="en-US" dirty="0"/>
+          </a:p>
+          <a:p>
+            <a:pPr marL="0" lvl="0" indent="0" algn="l" rtl="0">
+              <a:spcBef>
+                <a:spcPts val="0"/>
+              </a:spcBef>
+              <a:spcAft>
+                <a:spcPts val="0"/>
+              </a:spcAft>
+              <a:buNone/>
+            </a:pPr>
+            <a:endParaRPr lang="en-US" dirty="0"/>
+          </a:p>
+          <a:p>
+            <a:pPr marL="0" lvl="0" indent="0" algn="l" rtl="0">
+              <a:spcBef>
+                <a:spcPts val="0"/>
+              </a:spcBef>
+              <a:spcAft>
+                <a:spcPts val="0"/>
+              </a:spcAft>
+              <a:buNone/>
+            </a:pPr>
+            <a:r>
+              <a:rPr lang="en-US" dirty="0"/>
+              <a:t>---</a:t>
+            </a:r>
+          </a:p>
+          <a:p>
+            <a:pPr marL="0" lvl="0" indent="0" algn="l" rtl="0">
+              <a:spcBef>
+                <a:spcPts val="0"/>
+              </a:spcBef>
+              <a:spcAft>
+                <a:spcPts val="0"/>
+              </a:spcAft>
+              <a:buNone/>
+            </a:pPr>
+            <a:r>
+              <a:rPr lang="en-US" i="1" u="sng" dirty="0"/>
+              <a:t>For Reference:</a:t>
+            </a:r>
+          </a:p>
+          <a:p>
+            <a:pPr marL="0" lvl="0" indent="0" algn="l" rtl="0">
+              <a:spcBef>
+                <a:spcPts val="0"/>
+              </a:spcBef>
+              <a:spcAft>
+                <a:spcPts val="0"/>
+              </a:spcAft>
+              <a:buNone/>
+            </a:pPr>
+            <a:endParaRPr lang="en-US" dirty="0"/>
+          </a:p>
+          <a:p>
+            <a:pPr marL="0" lvl="0" indent="0" algn="l" rtl="0">
+              <a:spcBef>
+                <a:spcPts val="0"/>
+              </a:spcBef>
+              <a:spcAft>
+                <a:spcPts val="0"/>
+              </a:spcAft>
+              <a:buNone/>
+            </a:pPr>
+            <a:r>
+              <a:rPr lang="en-US" b="1" dirty="0"/>
+              <a:t>Architectural Breakdown</a:t>
+            </a:r>
+          </a:p>
+          <a:p>
+            <a:pPr marL="0" lvl="0" indent="0" algn="l" rtl="0">
+              <a:spcBef>
+                <a:spcPts val="0"/>
+              </a:spcBef>
+              <a:spcAft>
+                <a:spcPts val="0"/>
+              </a:spcAft>
+              <a:buNone/>
+            </a:pPr>
+            <a:r>
+              <a:rPr lang="en-US" dirty="0"/>
+              <a:t>The choice of endianness is a fundamental design decision of the Instruction Set Architecture (ISA).</a:t>
+            </a:r>
+          </a:p>
+          <a:p>
+            <a:pPr marL="0" lvl="0" indent="0" algn="l" rtl="0">
+              <a:spcBef>
+                <a:spcPts val="0"/>
+              </a:spcBef>
+              <a:spcAft>
+                <a:spcPts val="0"/>
+              </a:spcAft>
+              <a:buNone/>
+            </a:pPr>
+            <a:endParaRPr lang="en-US" b="1" dirty="0"/>
+          </a:p>
+          <a:p>
+            <a:pPr marL="228600" lvl="0" indent="-228600" algn="l" rtl="0">
+              <a:spcBef>
+                <a:spcPts val="0"/>
+              </a:spcBef>
+              <a:spcAft>
+                <a:spcPts val="0"/>
+              </a:spcAft>
+              <a:buAutoNum type="arabicPeriod"/>
+            </a:pPr>
+            <a:r>
+              <a:rPr lang="en-US" b="1" dirty="0"/>
+              <a:t>Little-Endian Architectures</a:t>
+            </a:r>
+          </a:p>
+          <a:p>
+            <a:pPr marL="0" lvl="0" indent="0" algn="l" rtl="0">
+              <a:spcBef>
+                <a:spcPts val="0"/>
+              </a:spcBef>
+              <a:spcAft>
+                <a:spcPts val="0"/>
+              </a:spcAft>
+              <a:buNone/>
+            </a:pPr>
+            <a:r>
+              <a:rPr lang="en-US" dirty="0"/>
+              <a:t>This is currently the most dominant order in consumer and enterprise computing.</a:t>
+            </a:r>
+          </a:p>
+          <a:p>
+            <a:pPr marL="228600" lvl="0" indent="-228600" algn="l" rtl="0">
+              <a:spcBef>
+                <a:spcPts val="0"/>
+              </a:spcBef>
+              <a:spcAft>
+                <a:spcPts val="0"/>
+              </a:spcAft>
+            </a:pPr>
+            <a:r>
+              <a:rPr lang="en-US" b="1" dirty="0"/>
+              <a:t>x86 and x86-64:</a:t>
+            </a:r>
+            <a:r>
+              <a:rPr lang="en-US" dirty="0"/>
+              <a:t> All Intel and AMD processors use little-endian.</a:t>
+            </a:r>
+          </a:p>
+          <a:p>
+            <a:pPr marL="228600" lvl="0" indent="-228600" algn="l" rtl="0">
+              <a:spcBef>
+                <a:spcPts val="0"/>
+              </a:spcBef>
+              <a:spcAft>
+                <a:spcPts val="0"/>
+              </a:spcAft>
+            </a:pPr>
+            <a:r>
+              <a:rPr lang="en-US" b="1" dirty="0"/>
+              <a:t>RISC-V:</a:t>
+            </a:r>
+            <a:r>
+              <a:rPr lang="en-US" dirty="0"/>
+              <a:t> By default, RISC-V is little-endian, though the specification allows for big-endian versions.</a:t>
+            </a:r>
+          </a:p>
+          <a:p>
+            <a:pPr marL="228600" lvl="0" indent="-228600" algn="l" rtl="0">
+              <a:spcBef>
+                <a:spcPts val="0"/>
+              </a:spcBef>
+              <a:spcAft>
+                <a:spcPts val="0"/>
+              </a:spcAft>
+            </a:pPr>
+            <a:r>
+              <a:rPr lang="en-US" b="1" dirty="0"/>
+              <a:t>iOS/Android Mobile Devices:</a:t>
+            </a:r>
+            <a:r>
+              <a:rPr lang="en-US" dirty="0"/>
+              <a:t> While the underlying ARM chips are technically capable of both, almost all mobile operating systems run exclusively in little-endian mode.</a:t>
+            </a:r>
+          </a:p>
+          <a:p>
+            <a:pPr marL="0" lvl="0" indent="0" algn="l" rtl="0">
+              <a:spcBef>
+                <a:spcPts val="0"/>
+              </a:spcBef>
+              <a:spcAft>
+                <a:spcPts val="0"/>
+              </a:spcAft>
+              <a:buNone/>
+            </a:pPr>
+            <a:endParaRPr lang="en-US" b="1" dirty="0"/>
+          </a:p>
+          <a:p>
+            <a:pPr marL="0" lvl="0" indent="0" algn="l" rtl="0">
+              <a:spcBef>
+                <a:spcPts val="0"/>
+              </a:spcBef>
+              <a:spcAft>
+                <a:spcPts val="0"/>
+              </a:spcAft>
+              <a:buNone/>
+            </a:pPr>
+            <a:r>
+              <a:rPr lang="en-US" b="1" dirty="0"/>
+              <a:t>2. Big-Endian Architectures</a:t>
+            </a:r>
+          </a:p>
+          <a:p>
+            <a:pPr marL="0" lvl="0" indent="0" algn="l" rtl="0">
+              <a:spcBef>
+                <a:spcPts val="0"/>
+              </a:spcBef>
+              <a:spcAft>
+                <a:spcPts val="0"/>
+              </a:spcAft>
+              <a:buNone/>
+            </a:pPr>
+            <a:r>
+              <a:rPr lang="en-US" dirty="0"/>
+              <a:t>Big-endian was the standard for many years in high-end workstations and networking hardware.</a:t>
+            </a:r>
+          </a:p>
+          <a:p>
+            <a:pPr marL="171450" lvl="0" indent="-171450" algn="l" rtl="0">
+              <a:spcBef>
+                <a:spcPts val="0"/>
+              </a:spcBef>
+              <a:spcAft>
+                <a:spcPts val="0"/>
+              </a:spcAft>
+            </a:pPr>
+            <a:r>
+              <a:rPr lang="en-US" b="1" dirty="0"/>
+              <a:t>IBM z/Architecture (Mainframes):</a:t>
+            </a:r>
+            <a:r>
+              <a:rPr lang="en-US" dirty="0"/>
+              <a:t> Consistently big-endian.</a:t>
+            </a:r>
+          </a:p>
+          <a:p>
+            <a:pPr marL="171450" lvl="0" indent="-171450" algn="l" rtl="0">
+              <a:spcBef>
+                <a:spcPts val="0"/>
+              </a:spcBef>
+              <a:spcAft>
+                <a:spcPts val="0"/>
+              </a:spcAft>
+            </a:pPr>
+            <a:r>
+              <a:rPr lang="en-US" b="1" dirty="0"/>
+              <a:t>Motorola 68000 &amp; early SPARC:</a:t>
+            </a:r>
+            <a:r>
+              <a:rPr lang="en-US" dirty="0"/>
+              <a:t> Classic workstation architectures.</a:t>
+            </a:r>
+          </a:p>
+          <a:p>
+            <a:pPr marL="171450" lvl="0" indent="-171450" algn="l" rtl="0">
+              <a:spcBef>
+                <a:spcPts val="0"/>
+              </a:spcBef>
+              <a:spcAft>
+                <a:spcPts val="0"/>
+              </a:spcAft>
+            </a:pPr>
+            <a:r>
+              <a:rPr lang="en-US" b="1" dirty="0"/>
+              <a:t>PowerPC (Legacy):</a:t>
+            </a:r>
+            <a:r>
+              <a:rPr lang="en-US" dirty="0"/>
+              <a:t> Older Mac hardware (G3, G4, G5) was big-endian.</a:t>
+            </a:r>
+          </a:p>
+          <a:p>
+            <a:pPr marL="171450" lvl="0" indent="-171450" algn="l" rtl="0">
+              <a:spcBef>
+                <a:spcPts val="0"/>
+              </a:spcBef>
+              <a:spcAft>
+                <a:spcPts val="0"/>
+              </a:spcAft>
+            </a:pPr>
+            <a:r>
+              <a:rPr lang="en-US" b="1" dirty="0"/>
+              <a:t>Network Protocols:</a:t>
+            </a:r>
+            <a:r>
+              <a:rPr lang="en-US" dirty="0"/>
+              <a:t> Often called </a:t>
+            </a:r>
+            <a:r>
+              <a:rPr lang="en-US" b="1" dirty="0"/>
+              <a:t>"Network Byte Order."</a:t>
+            </a:r>
+            <a:r>
+              <a:rPr lang="en-US" dirty="0"/>
+              <a:t> Regardless of the CPU architecture, protocols like TCP/IP require data to be transmitted in big-endian format.</a:t>
+            </a:r>
+          </a:p>
+          <a:p>
+            <a:pPr marL="0" lvl="0" indent="0" algn="l" rtl="0">
+              <a:spcBef>
+                <a:spcPts val="0"/>
+              </a:spcBef>
+              <a:spcAft>
+                <a:spcPts val="0"/>
+              </a:spcAft>
+              <a:buNone/>
+            </a:pPr>
+            <a:endParaRPr lang="en-US" b="1" dirty="0"/>
+          </a:p>
+          <a:p>
+            <a:pPr marL="0" lvl="0" indent="0" algn="l" rtl="0">
+              <a:spcBef>
+                <a:spcPts val="0"/>
+              </a:spcBef>
+              <a:spcAft>
+                <a:spcPts val="0"/>
+              </a:spcAft>
+              <a:buNone/>
+            </a:pPr>
+            <a:r>
+              <a:rPr lang="en-US" b="1" dirty="0"/>
+              <a:t>3. Bi-Endian Architectures</a:t>
+            </a:r>
+          </a:p>
+          <a:p>
+            <a:pPr marL="0" lvl="0" indent="0" algn="l" rtl="0">
+              <a:spcBef>
+                <a:spcPts val="0"/>
+              </a:spcBef>
+              <a:spcAft>
+                <a:spcPts val="0"/>
+              </a:spcAft>
+              <a:buNone/>
+            </a:pPr>
+            <a:r>
+              <a:rPr lang="en-US" dirty="0"/>
+              <a:t>Many modern architectures are "switchable," meaning the processor can be configured to operate in either mode at boot or via a state bit.</a:t>
+            </a:r>
+          </a:p>
+          <a:p>
+            <a:pPr marL="171450" lvl="0" indent="-171450" algn="l" rtl="0">
+              <a:spcBef>
+                <a:spcPts val="0"/>
+              </a:spcBef>
+              <a:spcAft>
+                <a:spcPts val="0"/>
+              </a:spcAft>
+            </a:pPr>
+            <a:r>
+              <a:rPr lang="en-US" b="1" dirty="0"/>
+              <a:t>ARM (v7, v8, v9):</a:t>
+            </a:r>
+            <a:r>
+              <a:rPr lang="en-US" dirty="0"/>
+              <a:t> Supports both, but as noted, little-endian is the industry standard for OS implementations.</a:t>
+            </a:r>
+          </a:p>
+          <a:p>
+            <a:pPr marL="171450" lvl="0" indent="-171450" algn="l" rtl="0">
+              <a:spcBef>
+                <a:spcPts val="0"/>
+              </a:spcBef>
+              <a:spcAft>
+                <a:spcPts val="0"/>
+              </a:spcAft>
+            </a:pPr>
+            <a:r>
+              <a:rPr lang="en-US" b="1" dirty="0"/>
+              <a:t>POWER/PowerPC:</a:t>
+            </a:r>
+            <a:r>
+              <a:rPr lang="en-US" dirty="0"/>
+              <a:t> Modern Power processors (like those in IBM’s POWER9 servers) can switch, though most modern Linux distributions on Power run in "Little-Endian" mode (PPC64LE).</a:t>
+            </a:r>
+          </a:p>
+          <a:p>
+            <a:pPr marL="171450" lvl="0" indent="-171450" algn="l" rtl="0">
+              <a:spcBef>
+                <a:spcPts val="0"/>
+              </a:spcBef>
+              <a:spcAft>
+                <a:spcPts val="0"/>
+              </a:spcAft>
+            </a:pPr>
+            <a:r>
+              <a:rPr lang="en-US" b="1" dirty="0"/>
+              <a:t>MIPS:</a:t>
+            </a:r>
+            <a:r>
+              <a:rPr lang="en-US" dirty="0"/>
+              <a:t> Historically used in both configurations (e.g., the Nintendo 64 was big-endian, while some </a:t>
+            </a:r>
+            <a:r>
+              <a:rPr lang="en-US" dirty="0" err="1"/>
+              <a:t>DECstations</a:t>
+            </a:r>
+            <a:r>
+              <a:rPr lang="en-US" dirty="0"/>
+              <a:t> were little-endian).</a:t>
+            </a:r>
+          </a:p>
+          <a:p>
+            <a:pPr marL="0" lvl="0" indent="0" algn="l" rtl="0">
+              <a:spcBef>
+                <a:spcPts val="0"/>
+              </a:spcBef>
+              <a:spcAft>
+                <a:spcPts val="0"/>
+              </a:spcAft>
+              <a:buNone/>
+            </a:pPr>
+            <a:endParaRPr lang="en-US" dirty="0"/>
           </a:p>
         </p:txBody>
       </p:sp>
@@ -36806,7 +37724,7 @@
               <a:defRPr/>
             </a:pPr>
             <a:r>
-              <a:rPr kumimoji="0" sz="1500" b="1" i="0" u="none" strike="noStrike" kern="0" cap="none" spc="0" normalizeH="0" baseline="0" noProof="0" dirty="0">
+              <a:rPr kumimoji="0" sz="1500" i="0" u="none" strike="noStrike" kern="0" cap="none" spc="0" normalizeH="0" baseline="0" noProof="0" dirty="0">
                 <a:ln>
                   <a:noFill/>
                 </a:ln>
@@ -36822,7 +37740,7 @@
               <a:t>TCP/IP</a:t>
             </a:r>
             <a:r>
-              <a:rPr kumimoji="0" sz="1500" b="1" i="0" u="none" strike="noStrike" kern="0" cap="none" spc="-55" normalizeH="0" baseline="0" noProof="0" dirty="0">
+              <a:rPr kumimoji="0" sz="1500" i="0" u="none" strike="noStrike" kern="0" cap="none" spc="-55" normalizeH="0" baseline="0" noProof="0" dirty="0">
                 <a:ln>
                   <a:noFill/>
                 </a:ln>
@@ -36838,7 +37756,7 @@
               <a:t> </a:t>
             </a:r>
             <a:r>
-              <a:rPr kumimoji="0" sz="1500" b="1" i="0" u="none" strike="noStrike" kern="0" cap="none" spc="-10" normalizeH="0" baseline="0" noProof="0" dirty="0">
+              <a:rPr kumimoji="0" sz="1500" i="0" u="none" strike="noStrike" kern="0" cap="none" spc="-10" normalizeH="0" baseline="0" noProof="0" dirty="0">
                 <a:ln>
                   <a:noFill/>
                 </a:ln>
@@ -36853,7 +37771,7 @@
               </a:rPr>
               <a:t>Model</a:t>
             </a:r>
-            <a:endParaRPr kumimoji="0" sz="1500" b="1" i="0" u="none" strike="noStrike" kern="0" cap="none" spc="0" normalizeH="0" baseline="0" noProof="0" dirty="0">
+            <a:endParaRPr kumimoji="0" sz="1500" i="0" u="none" strike="noStrike" kern="0" cap="none" spc="0" normalizeH="0" baseline="0" noProof="0" dirty="0">
               <a:ln>
                 <a:noFill/>
               </a:ln>

--- a/Lecture Slides/22 - Networking - Socket Programming.pptx
+++ b/Lecture Slides/22 - Networking - Socket Programming.pptx
@@ -37514,7 +37514,7 @@
         <p:spPr>
           <a:xfrm>
             <a:off x="654862" y="1900855"/>
-            <a:ext cx="5117465" cy="4140200"/>
+            <a:ext cx="5117465" cy="4167808"/>
           </a:xfrm>
           <a:prstGeom prst="rect">
             <a:avLst/>
@@ -37786,6 +37786,67 @@
             </a:endParaRPr>
           </a:p>
           <a:p>
+            <a:pPr marL="356235" indent="-343535">
+              <a:spcBef>
+                <a:spcPts val="900"/>
+              </a:spcBef>
+              <a:buClrTx/>
+              <a:buFontTx/>
+              <a:buChar char="●"/>
+              <a:tabLst>
+                <a:tab pos="356235" algn="l"/>
+              </a:tabLst>
+              <a:defRPr/>
+            </a:pPr>
+            <a:r>
+              <a:rPr lang="en-US" sz="1500" b="1" spc="-10" dirty="0">
+                <a:solidFill>
+                  <a:schemeClr val="tx1"/>
+                </a:solidFill>
+                <a:latin typeface="Arial MT"/>
+                <a:cs typeface="Arial MT"/>
+              </a:rPr>
+              <a:t>Client-</a:t>
+            </a:r>
+            <a:r>
+              <a:rPr lang="en-US" sz="1500" b="1" dirty="0">
+                <a:solidFill>
+                  <a:schemeClr val="tx1"/>
+                </a:solidFill>
+                <a:latin typeface="Arial MT"/>
+                <a:cs typeface="Arial MT"/>
+              </a:rPr>
+              <a:t>Server</a:t>
+            </a:r>
+            <a:r>
+              <a:rPr lang="en-US" sz="1500" b="1" spc="-25" dirty="0">
+                <a:solidFill>
+                  <a:schemeClr val="tx1"/>
+                </a:solidFill>
+                <a:latin typeface="Arial MT"/>
+                <a:cs typeface="Arial MT"/>
+              </a:rPr>
+              <a:t> </a:t>
+            </a:r>
+            <a:r>
+              <a:rPr lang="en-US" sz="1500" b="1" spc="-10" dirty="0">
+                <a:solidFill>
+                  <a:schemeClr val="tx1"/>
+                </a:solidFill>
+                <a:latin typeface="Arial MT"/>
+                <a:cs typeface="Arial MT"/>
+              </a:rPr>
+              <a:t>Model</a:t>
+            </a:r>
+            <a:endParaRPr lang="en-US" sz="1500" b="1" dirty="0">
+              <a:solidFill>
+                <a:schemeClr val="tx1"/>
+              </a:solidFill>
+              <a:latin typeface="Arial MT"/>
+              <a:cs typeface="Arial MT"/>
+            </a:endParaRPr>
+          </a:p>
+          <a:p>
             <a:pPr marL="356235" marR="0" lvl="0" indent="-343535" defTabSz="914400" eaLnBrk="1" fontAlgn="auto" latinLnBrk="0" hangingPunct="1">
               <a:lnSpc>
                 <a:spcPct val="100000"/>
@@ -37806,7 +37867,7 @@
               <a:defRPr/>
             </a:pPr>
             <a:r>
-              <a:rPr kumimoji="0" sz="1500" b="1" i="0" u="none" strike="noStrike" kern="0" cap="none" spc="0" normalizeH="0" baseline="0" noProof="0" dirty="0">
+              <a:rPr kumimoji="0" sz="1500" b="1" i="0" u="none" strike="noStrike" kern="0" cap="none" spc="0" normalizeH="0" baseline="0" noProof="0">
                 <a:ln>
                   <a:noFill/>
                 </a:ln>
@@ -37822,7 +37883,7 @@
               <a:t>Socket</a:t>
             </a:r>
             <a:r>
-              <a:rPr kumimoji="0" sz="1500" b="1" i="0" u="none" strike="noStrike" kern="0" cap="none" spc="-80" normalizeH="0" baseline="0" noProof="0" dirty="0">
+              <a:rPr kumimoji="0" sz="1500" b="1" i="0" u="none" strike="noStrike" kern="0" cap="none" spc="-80" normalizeH="0" baseline="0" noProof="0">
                 <a:ln>
                   <a:noFill/>
                 </a:ln>
@@ -37945,6 +38006,177 @@
               <a:effectLst/>
               <a:uLnTx/>
               <a:uFillTx/>
+              <a:latin typeface="Arial MT"/>
+              <a:cs typeface="Arial MT"/>
+            </a:endParaRPr>
+          </a:p>
+          <a:p>
+            <a:pPr marL="356235" lvl="0" indent="-343535">
+              <a:spcBef>
+                <a:spcPts val="900"/>
+              </a:spcBef>
+              <a:buClrTx/>
+              <a:buFontTx/>
+              <a:buChar char="●"/>
+              <a:tabLst>
+                <a:tab pos="356235" algn="l"/>
+              </a:tabLst>
+              <a:defRPr/>
+            </a:pPr>
+            <a:r>
+              <a:rPr lang="en-US" sz="1500" b="1" dirty="0">
+                <a:solidFill>
+                  <a:schemeClr val="tx1"/>
+                </a:solidFill>
+                <a:latin typeface="Arial MT"/>
+                <a:cs typeface="Arial MT"/>
+              </a:rPr>
+              <a:t>Host</a:t>
+            </a:r>
+            <a:r>
+              <a:rPr lang="en-US" sz="1500" b="1" spc="-40" dirty="0">
+                <a:solidFill>
+                  <a:schemeClr val="tx1"/>
+                </a:solidFill>
+                <a:latin typeface="Arial MT"/>
+                <a:cs typeface="Arial MT"/>
+              </a:rPr>
+              <a:t> </a:t>
+            </a:r>
+            <a:r>
+              <a:rPr lang="en-US" sz="1500" b="1" dirty="0">
+                <a:solidFill>
+                  <a:schemeClr val="tx1"/>
+                </a:solidFill>
+                <a:latin typeface="Arial MT"/>
+                <a:cs typeface="Arial MT"/>
+              </a:rPr>
+              <a:t>Byte</a:t>
+            </a:r>
+            <a:r>
+              <a:rPr lang="en-US" sz="1500" b="1" spc="-35" dirty="0">
+                <a:solidFill>
+                  <a:schemeClr val="tx1"/>
+                </a:solidFill>
+                <a:latin typeface="Arial MT"/>
+                <a:cs typeface="Arial MT"/>
+              </a:rPr>
+              <a:t> </a:t>
+            </a:r>
+            <a:r>
+              <a:rPr lang="en-US" sz="1500" b="1" dirty="0">
+                <a:solidFill>
+                  <a:schemeClr val="tx1"/>
+                </a:solidFill>
+                <a:latin typeface="Arial MT"/>
+                <a:cs typeface="Arial MT"/>
+              </a:rPr>
+              <a:t>Order</a:t>
+            </a:r>
+            <a:r>
+              <a:rPr lang="en-US" sz="1500" b="1" spc="-35" dirty="0">
+                <a:solidFill>
+                  <a:schemeClr val="tx1"/>
+                </a:solidFill>
+                <a:latin typeface="Arial MT"/>
+                <a:cs typeface="Arial MT"/>
+              </a:rPr>
+              <a:t> </a:t>
+            </a:r>
+            <a:r>
+              <a:rPr lang="en-US" sz="1500" b="1" dirty="0">
+                <a:solidFill>
+                  <a:schemeClr val="tx1"/>
+                </a:solidFill>
+                <a:latin typeface="Arial MT"/>
+                <a:cs typeface="Arial MT"/>
+              </a:rPr>
+              <a:t>to</a:t>
+            </a:r>
+            <a:r>
+              <a:rPr lang="en-US" sz="1500" b="1" spc="-35" dirty="0">
+                <a:solidFill>
+                  <a:schemeClr val="tx1"/>
+                </a:solidFill>
+                <a:latin typeface="Arial MT"/>
+                <a:cs typeface="Arial MT"/>
+              </a:rPr>
+              <a:t> </a:t>
+            </a:r>
+            <a:r>
+              <a:rPr lang="en-US" sz="1500" b="1" dirty="0">
+                <a:solidFill>
+                  <a:schemeClr val="tx1"/>
+                </a:solidFill>
+                <a:latin typeface="Arial MT"/>
+                <a:cs typeface="Arial MT"/>
+              </a:rPr>
+              <a:t>Network</a:t>
+            </a:r>
+            <a:r>
+              <a:rPr lang="en-US" sz="1500" b="1" spc="-35" dirty="0">
+                <a:solidFill>
+                  <a:schemeClr val="tx1"/>
+                </a:solidFill>
+                <a:latin typeface="Arial MT"/>
+                <a:cs typeface="Arial MT"/>
+              </a:rPr>
+              <a:t> </a:t>
+            </a:r>
+            <a:r>
+              <a:rPr lang="en-US" sz="1500" b="1" dirty="0">
+                <a:solidFill>
+                  <a:schemeClr val="tx1"/>
+                </a:solidFill>
+                <a:latin typeface="Arial MT"/>
+                <a:cs typeface="Arial MT"/>
+              </a:rPr>
+              <a:t>Byte</a:t>
+            </a:r>
+            <a:r>
+              <a:rPr lang="en-US" sz="1500" b="1" spc="-35" dirty="0">
+                <a:solidFill>
+                  <a:schemeClr val="tx1"/>
+                </a:solidFill>
+                <a:latin typeface="Arial MT"/>
+                <a:cs typeface="Arial MT"/>
+              </a:rPr>
+              <a:t> </a:t>
+            </a:r>
+            <a:r>
+              <a:rPr lang="en-US" sz="1500" b="1" dirty="0">
+                <a:solidFill>
+                  <a:schemeClr val="tx1"/>
+                </a:solidFill>
+                <a:latin typeface="Arial MT"/>
+                <a:cs typeface="Arial MT"/>
+              </a:rPr>
+              <a:t>Order</a:t>
+            </a:r>
+            <a:r>
+              <a:rPr lang="en-US" sz="1500" b="1" spc="-35" dirty="0">
+                <a:solidFill>
+                  <a:schemeClr val="tx1"/>
+                </a:solidFill>
+                <a:latin typeface="Arial MT"/>
+                <a:cs typeface="Arial MT"/>
+              </a:rPr>
+              <a:t> </a:t>
+            </a:r>
+            <a:r>
+              <a:rPr lang="en-US" sz="1500" b="1" spc="-10" dirty="0">
+                <a:solidFill>
+                  <a:schemeClr val="tx1"/>
+                </a:solidFill>
+                <a:latin typeface="Arial MT"/>
+                <a:cs typeface="Arial MT"/>
+              </a:rPr>
+              <a:t>Conversion</a:t>
+            </a:r>
+            <a:endParaRPr lang="en-US" sz="1500" b="1" dirty="0">
+              <a:solidFill>
+                <a:schemeClr val="tx1"/>
+              </a:solidFill>
               <a:latin typeface="Arial MT"/>
               <a:cs typeface="Arial MT"/>
             </a:endParaRPr>
@@ -38292,420 +38524,6 @@
                 <a:cs typeface="Arial MT"/>
               </a:rPr>
               <a:t>close</a:t>
-            </a:r>
-            <a:endParaRPr kumimoji="0" sz="1500" b="0" i="0" u="none" strike="noStrike" kern="0" cap="none" spc="0" normalizeH="0" baseline="0" noProof="0" dirty="0">
-              <a:ln>
-                <a:noFill/>
-              </a:ln>
-              <a:solidFill>
-                <a:schemeClr val="bg1">
-                  <a:lumMod val="65000"/>
-                </a:schemeClr>
-              </a:solidFill>
-              <a:effectLst/>
-              <a:uLnTx/>
-              <a:uFillTx/>
-              <a:latin typeface="Arial MT"/>
-              <a:cs typeface="Arial MT"/>
-            </a:endParaRPr>
-          </a:p>
-          <a:p>
-            <a:pPr marL="356235" marR="0" lvl="0" indent="-343535" defTabSz="914400" eaLnBrk="1" fontAlgn="auto" latinLnBrk="0" hangingPunct="1">
-              <a:lnSpc>
-                <a:spcPct val="100000"/>
-              </a:lnSpc>
-              <a:spcBef>
-                <a:spcPts val="900"/>
-              </a:spcBef>
-              <a:spcAft>
-                <a:spcPts val="0"/>
-              </a:spcAft>
-              <a:buClrTx/>
-              <a:buSzTx/>
-              <a:buFontTx/>
-              <a:buChar char="●"/>
-              <a:tabLst>
-                <a:tab pos="356235" algn="l"/>
-              </a:tabLst>
-              <a:defRPr/>
-            </a:pPr>
-            <a:r>
-              <a:rPr kumimoji="0" sz="1500" b="0" i="0" u="none" strike="noStrike" kern="0" cap="none" spc="-10" normalizeH="0" baseline="0" noProof="0" dirty="0">
-                <a:ln>
-                  <a:noFill/>
-                </a:ln>
-                <a:solidFill>
-                  <a:schemeClr val="bg1">
-                    <a:lumMod val="65000"/>
-                  </a:schemeClr>
-                </a:solidFill>
-                <a:effectLst/>
-                <a:uLnTx/>
-                <a:uFillTx/>
-                <a:latin typeface="Arial MT"/>
-                <a:cs typeface="Arial MT"/>
-              </a:rPr>
-              <a:t>Client-</a:t>
-            </a:r>
-            <a:r>
-              <a:rPr kumimoji="0" sz="1500" b="0" i="0" u="none" strike="noStrike" kern="0" cap="none" spc="0" normalizeH="0" baseline="0" noProof="0" dirty="0">
-                <a:ln>
-                  <a:noFill/>
-                </a:ln>
-                <a:solidFill>
-                  <a:schemeClr val="bg1">
-                    <a:lumMod val="65000"/>
-                  </a:schemeClr>
-                </a:solidFill>
-                <a:effectLst/>
-                <a:uLnTx/>
-                <a:uFillTx/>
-                <a:latin typeface="Arial MT"/>
-                <a:cs typeface="Arial MT"/>
-              </a:rPr>
-              <a:t>Server</a:t>
-            </a:r>
-            <a:r>
-              <a:rPr kumimoji="0" sz="1500" b="0" i="0" u="none" strike="noStrike" kern="0" cap="none" spc="-25" normalizeH="0" baseline="0" noProof="0" dirty="0">
-                <a:ln>
-                  <a:noFill/>
-                </a:ln>
-                <a:solidFill>
-                  <a:schemeClr val="bg1">
-                    <a:lumMod val="65000"/>
-                  </a:schemeClr>
-                </a:solidFill>
-                <a:effectLst/>
-                <a:uLnTx/>
-                <a:uFillTx/>
-                <a:latin typeface="Arial MT"/>
-                <a:cs typeface="Arial MT"/>
-              </a:rPr>
-              <a:t> </a:t>
-            </a:r>
-            <a:r>
-              <a:rPr kumimoji="0" sz="1500" b="0" i="0" u="none" strike="noStrike" kern="0" cap="none" spc="-10" normalizeH="0" baseline="0" noProof="0" dirty="0">
-                <a:ln>
-                  <a:noFill/>
-                </a:ln>
-                <a:solidFill>
-                  <a:schemeClr val="bg1">
-                    <a:lumMod val="65000"/>
-                  </a:schemeClr>
-                </a:solidFill>
-                <a:effectLst/>
-                <a:uLnTx/>
-                <a:uFillTx/>
-                <a:latin typeface="Arial MT"/>
-                <a:cs typeface="Arial MT"/>
-              </a:rPr>
-              <a:t>Model</a:t>
-            </a:r>
-            <a:endParaRPr kumimoji="0" sz="1500" b="0" i="0" u="none" strike="noStrike" kern="0" cap="none" spc="0" normalizeH="0" baseline="0" noProof="0" dirty="0">
-              <a:ln>
-                <a:noFill/>
-              </a:ln>
-              <a:solidFill>
-                <a:schemeClr val="bg1">
-                  <a:lumMod val="65000"/>
-                </a:schemeClr>
-              </a:solidFill>
-              <a:effectLst/>
-              <a:uLnTx/>
-              <a:uFillTx/>
-              <a:latin typeface="Arial MT"/>
-              <a:cs typeface="Arial MT"/>
-            </a:endParaRPr>
-          </a:p>
-          <a:p>
-            <a:pPr marL="356235" marR="0" lvl="0" indent="-343535" defTabSz="914400" eaLnBrk="1" fontAlgn="auto" latinLnBrk="0" hangingPunct="1">
-              <a:lnSpc>
-                <a:spcPct val="100000"/>
-              </a:lnSpc>
-              <a:spcBef>
-                <a:spcPts val="900"/>
-              </a:spcBef>
-              <a:spcAft>
-                <a:spcPts val="0"/>
-              </a:spcAft>
-              <a:buClrTx/>
-              <a:buSzTx/>
-              <a:buFontTx/>
-              <a:buChar char="●"/>
-              <a:tabLst>
-                <a:tab pos="356235" algn="l"/>
-              </a:tabLst>
-              <a:defRPr/>
-            </a:pPr>
-            <a:r>
-              <a:rPr kumimoji="0" sz="1500" b="0" i="0" u="none" strike="noStrike" kern="0" cap="none" spc="0" normalizeH="0" baseline="0" noProof="0" dirty="0">
-                <a:ln>
-                  <a:noFill/>
-                </a:ln>
-                <a:solidFill>
-                  <a:schemeClr val="bg1">
-                    <a:lumMod val="65000"/>
-                  </a:schemeClr>
-                </a:solidFill>
-                <a:effectLst/>
-                <a:uLnTx/>
-                <a:uFillTx/>
-                <a:latin typeface="Arial MT"/>
-                <a:cs typeface="Arial MT"/>
-              </a:rPr>
-              <a:t>Host</a:t>
-            </a:r>
-            <a:r>
-              <a:rPr kumimoji="0" sz="1500" b="0" i="0" u="none" strike="noStrike" kern="0" cap="none" spc="-40" normalizeH="0" baseline="0" noProof="0" dirty="0">
-                <a:ln>
-                  <a:noFill/>
-                </a:ln>
-                <a:solidFill>
-                  <a:schemeClr val="bg1">
-                    <a:lumMod val="65000"/>
-                  </a:schemeClr>
-                </a:solidFill>
-                <a:effectLst/>
-                <a:uLnTx/>
-                <a:uFillTx/>
-                <a:latin typeface="Arial MT"/>
-                <a:cs typeface="Arial MT"/>
-              </a:rPr>
-              <a:t> </a:t>
-            </a:r>
-            <a:r>
-              <a:rPr kumimoji="0" sz="1500" b="0" i="0" u="none" strike="noStrike" kern="0" cap="none" spc="0" normalizeH="0" baseline="0" noProof="0" dirty="0">
-                <a:ln>
-                  <a:noFill/>
-                </a:ln>
-                <a:solidFill>
-                  <a:schemeClr val="bg1">
-                    <a:lumMod val="65000"/>
-                  </a:schemeClr>
-                </a:solidFill>
-                <a:effectLst/>
-                <a:uLnTx/>
-                <a:uFillTx/>
-                <a:latin typeface="Arial MT"/>
-                <a:cs typeface="Arial MT"/>
-              </a:rPr>
-              <a:t>Byte</a:t>
-            </a:r>
-            <a:r>
-              <a:rPr kumimoji="0" sz="1500" b="0" i="0" u="none" strike="noStrike" kern="0" cap="none" spc="-35" normalizeH="0" baseline="0" noProof="0" dirty="0">
-                <a:ln>
-                  <a:noFill/>
-                </a:ln>
-                <a:solidFill>
-                  <a:schemeClr val="bg1">
-                    <a:lumMod val="65000"/>
-                  </a:schemeClr>
-                </a:solidFill>
-                <a:effectLst/>
-                <a:uLnTx/>
-                <a:uFillTx/>
-                <a:latin typeface="Arial MT"/>
-                <a:cs typeface="Arial MT"/>
-              </a:rPr>
-              <a:t> </a:t>
-            </a:r>
-            <a:r>
-              <a:rPr kumimoji="0" sz="1500" b="0" i="0" u="none" strike="noStrike" kern="0" cap="none" spc="0" normalizeH="0" baseline="0" noProof="0" dirty="0">
-                <a:ln>
-                  <a:noFill/>
-                </a:ln>
-                <a:solidFill>
-                  <a:schemeClr val="bg1">
-                    <a:lumMod val="65000"/>
-                  </a:schemeClr>
-                </a:solidFill>
-                <a:effectLst/>
-                <a:uLnTx/>
-                <a:uFillTx/>
-                <a:latin typeface="Arial MT"/>
-                <a:cs typeface="Arial MT"/>
-              </a:rPr>
-              <a:t>Order</a:t>
-            </a:r>
-            <a:r>
-              <a:rPr kumimoji="0" sz="1500" b="0" i="0" u="none" strike="noStrike" kern="0" cap="none" spc="-35" normalizeH="0" baseline="0" noProof="0" dirty="0">
-                <a:ln>
-                  <a:noFill/>
-                </a:ln>
-                <a:solidFill>
-                  <a:schemeClr val="bg1">
-                    <a:lumMod val="65000"/>
-                  </a:schemeClr>
-                </a:solidFill>
-                <a:effectLst/>
-                <a:uLnTx/>
-                <a:uFillTx/>
-                <a:latin typeface="Arial MT"/>
-                <a:cs typeface="Arial MT"/>
-              </a:rPr>
-              <a:t> </a:t>
-            </a:r>
-            <a:r>
-              <a:rPr kumimoji="0" sz="1500" b="0" i="0" u="none" strike="noStrike" kern="0" cap="none" spc="0" normalizeH="0" baseline="0" noProof="0" dirty="0">
-                <a:ln>
-                  <a:noFill/>
-                </a:ln>
-                <a:solidFill>
-                  <a:schemeClr val="bg1">
-                    <a:lumMod val="65000"/>
-                  </a:schemeClr>
-                </a:solidFill>
-                <a:effectLst/>
-                <a:uLnTx/>
-                <a:uFillTx/>
-                <a:latin typeface="Arial MT"/>
-                <a:cs typeface="Arial MT"/>
-              </a:rPr>
-              <a:t>to</a:t>
-            </a:r>
-            <a:r>
-              <a:rPr kumimoji="0" sz="1500" b="0" i="0" u="none" strike="noStrike" kern="0" cap="none" spc="-35" normalizeH="0" baseline="0" noProof="0" dirty="0">
-                <a:ln>
-                  <a:noFill/>
-                </a:ln>
-                <a:solidFill>
-                  <a:schemeClr val="bg1">
-                    <a:lumMod val="65000"/>
-                  </a:schemeClr>
-                </a:solidFill>
-                <a:effectLst/>
-                <a:uLnTx/>
-                <a:uFillTx/>
-                <a:latin typeface="Arial MT"/>
-                <a:cs typeface="Arial MT"/>
-              </a:rPr>
-              <a:t> </a:t>
-            </a:r>
-            <a:r>
-              <a:rPr kumimoji="0" sz="1500" b="0" i="0" u="none" strike="noStrike" kern="0" cap="none" spc="0" normalizeH="0" baseline="0" noProof="0" dirty="0">
-                <a:ln>
-                  <a:noFill/>
-                </a:ln>
-                <a:solidFill>
-                  <a:schemeClr val="bg1">
-                    <a:lumMod val="65000"/>
-                  </a:schemeClr>
-                </a:solidFill>
-                <a:effectLst/>
-                <a:uLnTx/>
-                <a:uFillTx/>
-                <a:latin typeface="Arial MT"/>
-                <a:cs typeface="Arial MT"/>
-              </a:rPr>
-              <a:t>Network</a:t>
-            </a:r>
-            <a:r>
-              <a:rPr kumimoji="0" sz="1500" b="0" i="0" u="none" strike="noStrike" kern="0" cap="none" spc="-35" normalizeH="0" baseline="0" noProof="0" dirty="0">
-                <a:ln>
-                  <a:noFill/>
-                </a:ln>
-                <a:solidFill>
-                  <a:schemeClr val="bg1">
-                    <a:lumMod val="65000"/>
-                  </a:schemeClr>
-                </a:solidFill>
-                <a:effectLst/>
-                <a:uLnTx/>
-                <a:uFillTx/>
-                <a:latin typeface="Arial MT"/>
-                <a:cs typeface="Arial MT"/>
-              </a:rPr>
-              <a:t> </a:t>
-            </a:r>
-            <a:r>
-              <a:rPr kumimoji="0" sz="1500" b="0" i="0" u="none" strike="noStrike" kern="0" cap="none" spc="0" normalizeH="0" baseline="0" noProof="0" dirty="0">
-                <a:ln>
-                  <a:noFill/>
-                </a:ln>
-                <a:solidFill>
-                  <a:schemeClr val="bg1">
-                    <a:lumMod val="65000"/>
-                  </a:schemeClr>
-                </a:solidFill>
-                <a:effectLst/>
-                <a:uLnTx/>
-                <a:uFillTx/>
-                <a:latin typeface="Arial MT"/>
-                <a:cs typeface="Arial MT"/>
-              </a:rPr>
-              <a:t>Byte</a:t>
-            </a:r>
-            <a:r>
-              <a:rPr kumimoji="0" sz="1500" b="0" i="0" u="none" strike="noStrike" kern="0" cap="none" spc="-35" normalizeH="0" baseline="0" noProof="0" dirty="0">
-                <a:ln>
-                  <a:noFill/>
-                </a:ln>
-                <a:solidFill>
-                  <a:schemeClr val="bg1">
-                    <a:lumMod val="65000"/>
-                  </a:schemeClr>
-                </a:solidFill>
-                <a:effectLst/>
-                <a:uLnTx/>
-                <a:uFillTx/>
-                <a:latin typeface="Arial MT"/>
-                <a:cs typeface="Arial MT"/>
-              </a:rPr>
-              <a:t> </a:t>
-            </a:r>
-            <a:r>
-              <a:rPr kumimoji="0" sz="1500" b="0" i="0" u="none" strike="noStrike" kern="0" cap="none" spc="0" normalizeH="0" baseline="0" noProof="0" dirty="0">
-                <a:ln>
-                  <a:noFill/>
-                </a:ln>
-                <a:solidFill>
-                  <a:schemeClr val="bg1">
-                    <a:lumMod val="65000"/>
-                  </a:schemeClr>
-                </a:solidFill>
-                <a:effectLst/>
-                <a:uLnTx/>
-                <a:uFillTx/>
-                <a:latin typeface="Arial MT"/>
-                <a:cs typeface="Arial MT"/>
-              </a:rPr>
-              <a:t>Order</a:t>
-            </a:r>
-            <a:r>
-              <a:rPr kumimoji="0" sz="1500" b="0" i="0" u="none" strike="noStrike" kern="0" cap="none" spc="-35" normalizeH="0" baseline="0" noProof="0" dirty="0">
-                <a:ln>
-                  <a:noFill/>
-                </a:ln>
-                <a:solidFill>
-                  <a:schemeClr val="bg1">
-                    <a:lumMod val="65000"/>
-                  </a:schemeClr>
-                </a:solidFill>
-                <a:effectLst/>
-                <a:uLnTx/>
-                <a:uFillTx/>
-                <a:latin typeface="Arial MT"/>
-                <a:cs typeface="Arial MT"/>
-              </a:rPr>
-              <a:t> </a:t>
-            </a:r>
-            <a:r>
-              <a:rPr kumimoji="0" sz="1500" b="0" i="0" u="none" strike="noStrike" kern="0" cap="none" spc="-10" normalizeH="0" baseline="0" noProof="0" dirty="0">
-                <a:ln>
-                  <a:noFill/>
-                </a:ln>
-                <a:solidFill>
-                  <a:schemeClr val="bg1">
-                    <a:lumMod val="65000"/>
-                  </a:schemeClr>
-                </a:solidFill>
-                <a:effectLst/>
-                <a:uLnTx/>
-                <a:uFillTx/>
-                <a:latin typeface="Arial MT"/>
-                <a:cs typeface="Arial MT"/>
-              </a:rPr>
-              <a:t>Conversion</a:t>
             </a:r>
             <a:endParaRPr kumimoji="0" sz="1500" b="0" i="0" u="none" strike="noStrike" kern="0" cap="none" spc="0" normalizeH="0" baseline="0" noProof="0" dirty="0">
               <a:ln>
